--- a/Модуль 1/Unity Модуль 1 Урок 2. Базові операції.pptx
+++ b/Модуль 1/Unity Модуль 1 Урок 2. Базові операції.pptx
@@ -219,7 +219,7 @@
           <a:p>
             <a:fld id="{DD81528B-9B6F-4248-9BF4-341C8496BA36}" type="datetimeFigureOut">
               <a:rPr lang="uk-UA" smtClean="0"/>
-              <a:t>20.07.2025</a:t>
+              <a:t>21.07.2025</a:t>
             </a:fld>
             <a:endParaRPr lang="uk-UA"/>
           </a:p>
@@ -2484,7 +2484,7 @@
           <a:p>
             <a:fld id="{F1E3972C-1D59-4812-9879-0ADA85AB86FA}" type="datetimeFigureOut">
               <a:rPr lang="uk-UA" smtClean="0"/>
-              <a:t>20.07.2025</a:t>
+              <a:t>21.07.2025</a:t>
             </a:fld>
             <a:endParaRPr lang="uk-UA"/>
           </a:p>
@@ -2684,7 +2684,7 @@
           <a:p>
             <a:fld id="{F1E3972C-1D59-4812-9879-0ADA85AB86FA}" type="datetimeFigureOut">
               <a:rPr lang="uk-UA" smtClean="0"/>
-              <a:t>20.07.2025</a:t>
+              <a:t>21.07.2025</a:t>
             </a:fld>
             <a:endParaRPr lang="uk-UA"/>
           </a:p>
@@ -2894,7 +2894,7 @@
           <a:p>
             <a:fld id="{F1E3972C-1D59-4812-9879-0ADA85AB86FA}" type="datetimeFigureOut">
               <a:rPr lang="uk-UA" smtClean="0"/>
-              <a:t>20.07.2025</a:t>
+              <a:t>21.07.2025</a:t>
             </a:fld>
             <a:endParaRPr lang="uk-UA"/>
           </a:p>
@@ -3094,7 +3094,7 @@
           <a:p>
             <a:fld id="{F1E3972C-1D59-4812-9879-0ADA85AB86FA}" type="datetimeFigureOut">
               <a:rPr lang="uk-UA" smtClean="0"/>
-              <a:t>20.07.2025</a:t>
+              <a:t>21.07.2025</a:t>
             </a:fld>
             <a:endParaRPr lang="uk-UA"/>
           </a:p>
@@ -3370,7 +3370,7 @@
           <a:p>
             <a:fld id="{F1E3972C-1D59-4812-9879-0ADA85AB86FA}" type="datetimeFigureOut">
               <a:rPr lang="uk-UA" smtClean="0"/>
-              <a:t>20.07.2025</a:t>
+              <a:t>21.07.2025</a:t>
             </a:fld>
             <a:endParaRPr lang="uk-UA"/>
           </a:p>
@@ -3638,7 +3638,7 @@
           <a:p>
             <a:fld id="{F1E3972C-1D59-4812-9879-0ADA85AB86FA}" type="datetimeFigureOut">
               <a:rPr lang="uk-UA" smtClean="0"/>
-              <a:t>20.07.2025</a:t>
+              <a:t>21.07.2025</a:t>
             </a:fld>
             <a:endParaRPr lang="uk-UA"/>
           </a:p>
@@ -4053,7 +4053,7 @@
           <a:p>
             <a:fld id="{F1E3972C-1D59-4812-9879-0ADA85AB86FA}" type="datetimeFigureOut">
               <a:rPr lang="uk-UA" smtClean="0"/>
-              <a:t>20.07.2025</a:t>
+              <a:t>21.07.2025</a:t>
             </a:fld>
             <a:endParaRPr lang="uk-UA"/>
           </a:p>
@@ -4195,7 +4195,7 @@
           <a:p>
             <a:fld id="{F1E3972C-1D59-4812-9879-0ADA85AB86FA}" type="datetimeFigureOut">
               <a:rPr lang="uk-UA" smtClean="0"/>
-              <a:t>20.07.2025</a:t>
+              <a:t>21.07.2025</a:t>
             </a:fld>
             <a:endParaRPr lang="uk-UA"/>
           </a:p>
@@ -4308,7 +4308,7 @@
           <a:p>
             <a:fld id="{F1E3972C-1D59-4812-9879-0ADA85AB86FA}" type="datetimeFigureOut">
               <a:rPr lang="uk-UA" smtClean="0"/>
-              <a:t>20.07.2025</a:t>
+              <a:t>21.07.2025</a:t>
             </a:fld>
             <a:endParaRPr lang="uk-UA"/>
           </a:p>
@@ -4621,7 +4621,7 @@
           <a:p>
             <a:fld id="{F1E3972C-1D59-4812-9879-0ADA85AB86FA}" type="datetimeFigureOut">
               <a:rPr lang="uk-UA" smtClean="0"/>
-              <a:t>20.07.2025</a:t>
+              <a:t>21.07.2025</a:t>
             </a:fld>
             <a:endParaRPr lang="uk-UA"/>
           </a:p>
@@ -4910,7 +4910,7 @@
           <a:p>
             <a:fld id="{F1E3972C-1D59-4812-9879-0ADA85AB86FA}" type="datetimeFigureOut">
               <a:rPr lang="uk-UA" smtClean="0"/>
-              <a:t>20.07.2025</a:t>
+              <a:t>21.07.2025</a:t>
             </a:fld>
             <a:endParaRPr lang="uk-UA"/>
           </a:p>
@@ -5153,7 +5153,7 @@
           <a:p>
             <a:fld id="{F1E3972C-1D59-4812-9879-0ADA85AB86FA}" type="datetimeFigureOut">
               <a:rPr lang="uk-UA" smtClean="0"/>
-              <a:t>20.07.2025</a:t>
+              <a:t>21.07.2025</a:t>
             </a:fld>
             <a:endParaRPr lang="uk-UA"/>
           </a:p>

--- a/Модуль 1/Unity Модуль 1 Урок 2. Базові операції.pptx
+++ b/Модуль 1/Unity Модуль 1 Урок 2. Базові операції.pptx
@@ -5,7 +5,7 @@
     <p:sldMasterId id="2147483648" r:id="rId1"/>
   </p:sldMasterIdLst>
   <p:notesMasterIdLst>
-    <p:notesMasterId r:id="rId29"/>
+    <p:notesMasterId r:id="rId30"/>
   </p:notesMasterIdLst>
   <p:sldIdLst>
     <p:sldId id="256" r:id="rId2"/>
@@ -29,12 +29,13 @@
     <p:sldId id="279" r:id="rId20"/>
     <p:sldId id="280" r:id="rId21"/>
     <p:sldId id="281" r:id="rId22"/>
-    <p:sldId id="259" r:id="rId23"/>
-    <p:sldId id="286" r:id="rId24"/>
-    <p:sldId id="287" r:id="rId25"/>
-    <p:sldId id="288" r:id="rId26"/>
-    <p:sldId id="283" r:id="rId27"/>
-    <p:sldId id="285" r:id="rId28"/>
+    <p:sldId id="914" r:id="rId23"/>
+    <p:sldId id="259" r:id="rId24"/>
+    <p:sldId id="286" r:id="rId25"/>
+    <p:sldId id="287" r:id="rId26"/>
+    <p:sldId id="288" r:id="rId27"/>
+    <p:sldId id="283" r:id="rId28"/>
+    <p:sldId id="285" r:id="rId29"/>
   </p:sldIdLst>
   <p:sldSz cx="12192000" cy="6858000"/>
   <p:notesSz cx="6858000" cy="9144000"/>
@@ -223,7 +224,7 @@
           <a:p>
             <a:fld id="{DD81528B-9B6F-4248-9BF4-341C8496BA36}" type="datetimeFigureOut">
               <a:rPr lang="uk-UA" smtClean="0"/>
-              <a:t>27.07.2025</a:t>
+              <a:t>05.11.2025</a:t>
             </a:fld>
             <a:endParaRPr lang="uk-UA"/>
           </a:p>
@@ -1648,7 +1649,7 @@
           <a:p>
             <a:fld id="{9B40F577-1FC1-4001-B2C2-9EAF79F39BE2}" type="slidenum">
               <a:rPr lang="uk-UA" smtClean="0"/>
-              <a:t>26</a:t>
+              <a:t>27</a:t>
             </a:fld>
             <a:endParaRPr lang="uk-UA"/>
           </a:p>
@@ -1732,7 +1733,7 @@
           <a:p>
             <a:fld id="{9B40F577-1FC1-4001-B2C2-9EAF79F39BE2}" type="slidenum">
               <a:rPr lang="uk-UA" smtClean="0"/>
-              <a:t>27</a:t>
+              <a:t>28</a:t>
             </a:fld>
             <a:endParaRPr lang="uk-UA"/>
           </a:p>
@@ -2488,7 +2489,7 @@
           <a:p>
             <a:fld id="{F1E3972C-1D59-4812-9879-0ADA85AB86FA}" type="datetimeFigureOut">
               <a:rPr lang="uk-UA" smtClean="0"/>
-              <a:t>27.07.2025</a:t>
+              <a:t>05.11.2025</a:t>
             </a:fld>
             <a:endParaRPr lang="uk-UA"/>
           </a:p>
@@ -2688,7 +2689,7 @@
           <a:p>
             <a:fld id="{F1E3972C-1D59-4812-9879-0ADA85AB86FA}" type="datetimeFigureOut">
               <a:rPr lang="uk-UA" smtClean="0"/>
-              <a:t>27.07.2025</a:t>
+              <a:t>05.11.2025</a:t>
             </a:fld>
             <a:endParaRPr lang="uk-UA"/>
           </a:p>
@@ -2898,7 +2899,7 @@
           <a:p>
             <a:fld id="{F1E3972C-1D59-4812-9879-0ADA85AB86FA}" type="datetimeFigureOut">
               <a:rPr lang="uk-UA" smtClean="0"/>
-              <a:t>27.07.2025</a:t>
+              <a:t>05.11.2025</a:t>
             </a:fld>
             <a:endParaRPr lang="uk-UA"/>
           </a:p>
@@ -2971,6 +2972,41 @@
 </p:sldLayout>
 </file>
 
+<file path=ppt/slideLayouts/slideLayout12.xml><?xml version="1.0" encoding="utf-8"?>
+<p:sldLayout xmlns:a="http://schemas.openxmlformats.org/drawingml/2006/main" xmlns:r="http://schemas.openxmlformats.org/officeDocument/2006/relationships" xmlns:p="http://schemas.openxmlformats.org/presentationml/2006/main">
+  <p:cSld name="DEFAULT">
+    <p:bg>
+      <p:bgRef idx="1001">
+        <a:schemeClr val="bg1"/>
+      </p:bgRef>
+    </p:bg>
+    <p:spTree>
+      <p:nvGrpSpPr>
+        <p:cNvPr id="1" name=""/>
+        <p:cNvGrpSpPr/>
+        <p:nvPr/>
+      </p:nvGrpSpPr>
+      <p:grpSpPr>
+        <a:xfrm>
+          <a:off x="0" y="0"/>
+          <a:ext cx="0" cy="0"/>
+          <a:chOff x="0" y="0"/>
+          <a:chExt cx="0" cy="0"/>
+        </a:xfrm>
+      </p:grpSpPr>
+    </p:spTree>
+    <p:extLst>
+      <p:ext uri="{BB962C8B-B14F-4D97-AF65-F5344CB8AC3E}">
+        <p14:creationId xmlns:p14="http://schemas.microsoft.com/office/powerpoint/2010/main" val="836916211"/>
+      </p:ext>
+    </p:extLst>
+  </p:cSld>
+  <p:clrMapOvr>
+    <a:masterClrMapping/>
+  </p:clrMapOvr>
+</p:sldLayout>
+</file>
+
 <file path=ppt/slideLayouts/slideLayout2.xml><?xml version="1.0" encoding="utf-8"?>
 <p:sldLayout xmlns:a="http://schemas.openxmlformats.org/drawingml/2006/main" xmlns:r="http://schemas.openxmlformats.org/officeDocument/2006/relationships" xmlns:p="http://schemas.openxmlformats.org/presentationml/2006/main" type="obj" preserve="1">
   <p:cSld name="Заголовок и объект">
@@ -3098,7 +3134,7 @@
           <a:p>
             <a:fld id="{F1E3972C-1D59-4812-9879-0ADA85AB86FA}" type="datetimeFigureOut">
               <a:rPr lang="uk-UA" smtClean="0"/>
-              <a:t>27.07.2025</a:t>
+              <a:t>05.11.2025</a:t>
             </a:fld>
             <a:endParaRPr lang="uk-UA"/>
           </a:p>
@@ -3374,7 +3410,7 @@
           <a:p>
             <a:fld id="{F1E3972C-1D59-4812-9879-0ADA85AB86FA}" type="datetimeFigureOut">
               <a:rPr lang="uk-UA" smtClean="0"/>
-              <a:t>27.07.2025</a:t>
+              <a:t>05.11.2025</a:t>
             </a:fld>
             <a:endParaRPr lang="uk-UA"/>
           </a:p>
@@ -3642,7 +3678,7 @@
           <a:p>
             <a:fld id="{F1E3972C-1D59-4812-9879-0ADA85AB86FA}" type="datetimeFigureOut">
               <a:rPr lang="uk-UA" smtClean="0"/>
-              <a:t>27.07.2025</a:t>
+              <a:t>05.11.2025</a:t>
             </a:fld>
             <a:endParaRPr lang="uk-UA"/>
           </a:p>
@@ -4057,7 +4093,7 @@
           <a:p>
             <a:fld id="{F1E3972C-1D59-4812-9879-0ADA85AB86FA}" type="datetimeFigureOut">
               <a:rPr lang="uk-UA" smtClean="0"/>
-              <a:t>27.07.2025</a:t>
+              <a:t>05.11.2025</a:t>
             </a:fld>
             <a:endParaRPr lang="uk-UA"/>
           </a:p>
@@ -4199,7 +4235,7 @@
           <a:p>
             <a:fld id="{F1E3972C-1D59-4812-9879-0ADA85AB86FA}" type="datetimeFigureOut">
               <a:rPr lang="uk-UA" smtClean="0"/>
-              <a:t>27.07.2025</a:t>
+              <a:t>05.11.2025</a:t>
             </a:fld>
             <a:endParaRPr lang="uk-UA"/>
           </a:p>
@@ -4312,7 +4348,7 @@
           <a:p>
             <a:fld id="{F1E3972C-1D59-4812-9879-0ADA85AB86FA}" type="datetimeFigureOut">
               <a:rPr lang="uk-UA" smtClean="0"/>
-              <a:t>27.07.2025</a:t>
+              <a:t>05.11.2025</a:t>
             </a:fld>
             <a:endParaRPr lang="uk-UA"/>
           </a:p>
@@ -4625,7 +4661,7 @@
           <a:p>
             <a:fld id="{F1E3972C-1D59-4812-9879-0ADA85AB86FA}" type="datetimeFigureOut">
               <a:rPr lang="uk-UA" smtClean="0"/>
-              <a:t>27.07.2025</a:t>
+              <a:t>05.11.2025</a:t>
             </a:fld>
             <a:endParaRPr lang="uk-UA"/>
           </a:p>
@@ -4914,7 +4950,7 @@
           <a:p>
             <a:fld id="{F1E3972C-1D59-4812-9879-0ADA85AB86FA}" type="datetimeFigureOut">
               <a:rPr lang="uk-UA" smtClean="0"/>
-              <a:t>27.07.2025</a:t>
+              <a:t>05.11.2025</a:t>
             </a:fld>
             <a:endParaRPr lang="uk-UA"/>
           </a:p>
@@ -5157,7 +5193,7 @@
           <a:p>
             <a:fld id="{F1E3972C-1D59-4812-9879-0ADA85AB86FA}" type="datetimeFigureOut">
               <a:rPr lang="uk-UA" smtClean="0"/>
-              <a:t>27.07.2025</a:t>
+              <a:t>05.11.2025</a:t>
             </a:fld>
             <a:endParaRPr lang="uk-UA"/>
           </a:p>
@@ -5273,6 +5309,7 @@
     <p:sldLayoutId id="2147483657" r:id="rId9"/>
     <p:sldLayoutId id="2147483658" r:id="rId10"/>
     <p:sldLayoutId id="2147483659" r:id="rId11"/>
+    <p:sldLayoutId id="2147483660" r:id="rId12"/>
   </p:sldLayoutIdLst>
   <p:txStyles>
     <p:titleStyle>
@@ -20710,6 +20747,1157 @@
       </p:grpSpPr>
       <p:sp>
         <p:nvSpPr>
+          <p:cNvPr id="3" name="Text 1">
+            <a:extLst>
+              <a:ext uri="{FF2B5EF4-FFF2-40B4-BE49-F238E27FC236}">
+                <a16:creationId xmlns:a16="http://schemas.microsoft.com/office/drawing/2014/main" id="{98545B91-B4B5-486C-BA76-ABD6621F707F}"/>
+              </a:ext>
+            </a:extLst>
+          </p:cNvPr>
+          <p:cNvSpPr/>
+          <p:nvPr/>
+        </p:nvSpPr>
+        <p:spPr>
+          <a:xfrm>
+            <a:off x="23634" y="-88867"/>
+            <a:ext cx="9315688" cy="1381125"/>
+          </a:xfrm>
+          <a:prstGeom prst="rect">
+            <a:avLst/>
+          </a:prstGeom>
+          <a:noFill/>
+          <a:ln/>
+        </p:spPr>
+        <p:txBody>
+          <a:bodyPr wrap="square" rtlCol="0" anchor="t"/>
+          <a:lstStyle>
+            <a:lvl1pPr marL="0" algn="l" defTabSz="914400" rtl="0" eaLnBrk="1" latinLnBrk="0" hangingPunct="1">
+              <a:defRPr sz="1800" kern="1200">
+                <a:solidFill>
+                  <a:schemeClr val="tx1"/>
+                </a:solidFill>
+                <a:latin typeface="+mn-lt"/>
+                <a:ea typeface="+mn-ea"/>
+                <a:cs typeface="+mn-cs"/>
+              </a:defRPr>
+            </a:lvl1pPr>
+            <a:lvl2pPr marL="457200" algn="l" defTabSz="914400" rtl="0" eaLnBrk="1" latinLnBrk="0" hangingPunct="1">
+              <a:defRPr sz="1800" kern="1200">
+                <a:solidFill>
+                  <a:schemeClr val="tx1"/>
+                </a:solidFill>
+                <a:latin typeface="+mn-lt"/>
+                <a:ea typeface="+mn-ea"/>
+                <a:cs typeface="+mn-cs"/>
+              </a:defRPr>
+            </a:lvl2pPr>
+            <a:lvl3pPr marL="914400" algn="l" defTabSz="914400" rtl="0" eaLnBrk="1" latinLnBrk="0" hangingPunct="1">
+              <a:defRPr sz="1800" kern="1200">
+                <a:solidFill>
+                  <a:schemeClr val="tx1"/>
+                </a:solidFill>
+                <a:latin typeface="+mn-lt"/>
+                <a:ea typeface="+mn-ea"/>
+                <a:cs typeface="+mn-cs"/>
+              </a:defRPr>
+            </a:lvl3pPr>
+            <a:lvl4pPr marL="1371600" algn="l" defTabSz="914400" rtl="0" eaLnBrk="1" latinLnBrk="0" hangingPunct="1">
+              <a:defRPr sz="1800" kern="1200">
+                <a:solidFill>
+                  <a:schemeClr val="tx1"/>
+                </a:solidFill>
+                <a:latin typeface="+mn-lt"/>
+                <a:ea typeface="+mn-ea"/>
+                <a:cs typeface="+mn-cs"/>
+              </a:defRPr>
+            </a:lvl4pPr>
+            <a:lvl5pPr marL="1828800" algn="l" defTabSz="914400" rtl="0" eaLnBrk="1" latinLnBrk="0" hangingPunct="1">
+              <a:defRPr sz="1800" kern="1200">
+                <a:solidFill>
+                  <a:schemeClr val="tx1"/>
+                </a:solidFill>
+                <a:latin typeface="+mn-lt"/>
+                <a:ea typeface="+mn-ea"/>
+                <a:cs typeface="+mn-cs"/>
+              </a:defRPr>
+            </a:lvl5pPr>
+            <a:lvl6pPr marL="2286000" algn="l" defTabSz="914400" rtl="0" eaLnBrk="1" latinLnBrk="0" hangingPunct="1">
+              <a:defRPr sz="1800" kern="1200">
+                <a:solidFill>
+                  <a:schemeClr val="tx1"/>
+                </a:solidFill>
+                <a:latin typeface="+mn-lt"/>
+                <a:ea typeface="+mn-ea"/>
+                <a:cs typeface="+mn-cs"/>
+              </a:defRPr>
+            </a:lvl6pPr>
+            <a:lvl7pPr marL="2743200" algn="l" defTabSz="914400" rtl="0" eaLnBrk="1" latinLnBrk="0" hangingPunct="1">
+              <a:defRPr sz="1800" kern="1200">
+                <a:solidFill>
+                  <a:schemeClr val="tx1"/>
+                </a:solidFill>
+                <a:latin typeface="+mn-lt"/>
+                <a:ea typeface="+mn-ea"/>
+                <a:cs typeface="+mn-cs"/>
+              </a:defRPr>
+            </a:lvl7pPr>
+            <a:lvl8pPr marL="3200400" algn="l" defTabSz="914400" rtl="0" eaLnBrk="1" latinLnBrk="0" hangingPunct="1">
+              <a:defRPr sz="1800" kern="1200">
+                <a:solidFill>
+                  <a:schemeClr val="tx1"/>
+                </a:solidFill>
+                <a:latin typeface="+mn-lt"/>
+                <a:ea typeface="+mn-ea"/>
+                <a:cs typeface="+mn-cs"/>
+              </a:defRPr>
+            </a:lvl8pPr>
+            <a:lvl9pPr marL="3657600" algn="l" defTabSz="914400" rtl="0" eaLnBrk="1" latinLnBrk="0" hangingPunct="1">
+              <a:defRPr sz="1800" kern="1200">
+                <a:solidFill>
+                  <a:schemeClr val="tx1"/>
+                </a:solidFill>
+                <a:latin typeface="+mn-lt"/>
+                <a:ea typeface="+mn-ea"/>
+                <a:cs typeface="+mn-cs"/>
+              </a:defRPr>
+            </a:lvl9pPr>
+          </a:lstStyle>
+          <a:p>
+            <a:pPr marL="0" indent="0">
+              <a:lnSpc>
+                <a:spcPts val="5437"/>
+              </a:lnSpc>
+              <a:buNone/>
+            </a:pPr>
+            <a:r>
+              <a:rPr lang="en-US" sz="4350" dirty="0">
+                <a:solidFill>
+                  <a:srgbClr val="312F2B"/>
+                </a:solidFill>
+                <a:latin typeface="Gelasio" pitchFamily="34" charset="0"/>
+                <a:ea typeface="Gelasio" pitchFamily="34" charset="-122"/>
+                <a:cs typeface="Gelasio" pitchFamily="34" charset="-120"/>
+              </a:rPr>
+              <a:t>Тернарна операція в мові </a:t>
+            </a:r>
+            <a:r>
+              <a:rPr lang="en-US" sz="4350" dirty="0" err="1">
+                <a:solidFill>
+                  <a:srgbClr val="312F2B"/>
+                </a:solidFill>
+                <a:latin typeface="Gelasio" pitchFamily="34" charset="0"/>
+                <a:ea typeface="Gelasio" pitchFamily="34" charset="-122"/>
+                <a:cs typeface="Gelasio" pitchFamily="34" charset="-120"/>
+              </a:rPr>
+              <a:t>програмування</a:t>
+            </a:r>
+            <a:r>
+              <a:rPr lang="en-US" sz="4350" dirty="0">
+                <a:solidFill>
+                  <a:srgbClr val="312F2B"/>
+                </a:solidFill>
+                <a:latin typeface="Gelasio" pitchFamily="34" charset="0"/>
+                <a:ea typeface="Gelasio" pitchFamily="34" charset="-122"/>
+                <a:cs typeface="Gelasio" pitchFamily="34" charset="-120"/>
+              </a:rPr>
+              <a:t> C#</a:t>
+            </a:r>
+            <a:endParaRPr lang="en-US" sz="4350" dirty="0"/>
+          </a:p>
+        </p:txBody>
+      </p:sp>
+      <p:sp>
+        <p:nvSpPr>
+          <p:cNvPr id="4" name="TextBox 3">
+            <a:extLst>
+              <a:ext uri="{FF2B5EF4-FFF2-40B4-BE49-F238E27FC236}">
+                <a16:creationId xmlns:a16="http://schemas.microsoft.com/office/drawing/2014/main" id="{AD993AF7-8730-44B6-9A3F-45500C2989E3}"/>
+              </a:ext>
+            </a:extLst>
+          </p:cNvPr>
+          <p:cNvSpPr txBox="1"/>
+          <p:nvPr/>
+        </p:nvSpPr>
+        <p:spPr>
+          <a:xfrm>
+            <a:off x="435990" y="1884198"/>
+            <a:ext cx="6094428" cy="4524315"/>
+          </a:xfrm>
+          <a:prstGeom prst="rect">
+            <a:avLst/>
+          </a:prstGeom>
+          <a:noFill/>
+        </p:spPr>
+        <p:txBody>
+          <a:bodyPr wrap="square">
+            <a:spAutoFit/>
+          </a:bodyPr>
+          <a:lstStyle/>
+          <a:p>
+            <a:r>
+              <a:rPr lang="uk-UA" dirty="0">
+                <a:latin typeface="Courier New" panose="02070309020205020404" pitchFamily="49" charset="0"/>
+                <a:cs typeface="Courier New" panose="02070309020205020404" pitchFamily="49" charset="0"/>
+              </a:rPr>
+              <a:t>результат = (умова) ? </a:t>
+            </a:r>
+            <a:r>
+              <a:rPr lang="uk-UA" dirty="0" err="1">
+                <a:latin typeface="Courier New" panose="02070309020205020404" pitchFamily="49" charset="0"/>
+                <a:cs typeface="Courier New" panose="02070309020205020404" pitchFamily="49" charset="0"/>
+              </a:rPr>
+              <a:t>значення_якщо_умова_правдива</a:t>
+            </a:r>
+            <a:r>
+              <a:rPr lang="uk-UA" dirty="0">
+                <a:latin typeface="Courier New" panose="02070309020205020404" pitchFamily="49" charset="0"/>
+                <a:cs typeface="Courier New" panose="02070309020205020404" pitchFamily="49" charset="0"/>
+              </a:rPr>
+              <a:t> : </a:t>
+            </a:r>
+            <a:r>
+              <a:rPr lang="uk-UA" dirty="0" err="1">
+                <a:latin typeface="Courier New" panose="02070309020205020404" pitchFamily="49" charset="0"/>
+                <a:cs typeface="Courier New" panose="02070309020205020404" pitchFamily="49" charset="0"/>
+              </a:rPr>
+              <a:t>значення_якщо_умова_хибна</a:t>
+            </a:r>
+            <a:r>
+              <a:rPr lang="uk-UA" dirty="0">
+                <a:latin typeface="Courier New" panose="02070309020205020404" pitchFamily="49" charset="0"/>
+                <a:cs typeface="Courier New" panose="02070309020205020404" pitchFamily="49" charset="0"/>
+              </a:rPr>
+              <a:t>;</a:t>
+            </a:r>
+          </a:p>
+          <a:p>
+            <a:endParaRPr lang="uk-UA" dirty="0"/>
+          </a:p>
+          <a:p>
+            <a:r>
+              <a:rPr lang="uk-UA" dirty="0"/>
+              <a:t>Ось приклад використання </a:t>
+            </a:r>
+            <a:r>
+              <a:rPr lang="uk-UA" dirty="0" err="1"/>
+              <a:t>тернарної</a:t>
+            </a:r>
+            <a:r>
+              <a:rPr lang="uk-UA" dirty="0"/>
+              <a:t> операції в </a:t>
+            </a:r>
+            <a:r>
+              <a:rPr lang="uk-UA" dirty="0" err="1"/>
+              <a:t>Java</a:t>
+            </a:r>
+            <a:r>
+              <a:rPr lang="uk-UA" dirty="0"/>
+              <a:t>:</a:t>
+            </a:r>
+          </a:p>
+          <a:p>
+            <a:endParaRPr lang="uk-UA" dirty="0"/>
+          </a:p>
+          <a:p>
+            <a:r>
+              <a:rPr lang="uk-UA" dirty="0" err="1">
+                <a:latin typeface="Courier New" panose="02070309020205020404" pitchFamily="49" charset="0"/>
+                <a:cs typeface="Courier New" panose="02070309020205020404" pitchFamily="49" charset="0"/>
+              </a:rPr>
+              <a:t>int</a:t>
+            </a:r>
+            <a:r>
+              <a:rPr lang="uk-UA" dirty="0">
+                <a:latin typeface="Courier New" panose="02070309020205020404" pitchFamily="49" charset="0"/>
+                <a:cs typeface="Courier New" panose="02070309020205020404" pitchFamily="49" charset="0"/>
+              </a:rPr>
+              <a:t> число1 = 10;</a:t>
+            </a:r>
+          </a:p>
+          <a:p>
+            <a:r>
+              <a:rPr lang="uk-UA" dirty="0" err="1">
+                <a:latin typeface="Courier New" panose="02070309020205020404" pitchFamily="49" charset="0"/>
+                <a:cs typeface="Courier New" panose="02070309020205020404" pitchFamily="49" charset="0"/>
+              </a:rPr>
+              <a:t>int</a:t>
+            </a:r>
+            <a:r>
+              <a:rPr lang="uk-UA" dirty="0">
+                <a:latin typeface="Courier New" panose="02070309020205020404" pitchFamily="49" charset="0"/>
+                <a:cs typeface="Courier New" panose="02070309020205020404" pitchFamily="49" charset="0"/>
+              </a:rPr>
+              <a:t> число2 = 20;</a:t>
+            </a:r>
+          </a:p>
+          <a:p>
+            <a:endParaRPr lang="uk-UA" dirty="0">
+              <a:latin typeface="Courier New" panose="02070309020205020404" pitchFamily="49" charset="0"/>
+              <a:cs typeface="Courier New" panose="02070309020205020404" pitchFamily="49" charset="0"/>
+            </a:endParaRPr>
+          </a:p>
+          <a:p>
+            <a:r>
+              <a:rPr lang="uk-UA" dirty="0" err="1">
+                <a:latin typeface="Courier New" panose="02070309020205020404" pitchFamily="49" charset="0"/>
+                <a:cs typeface="Courier New" panose="02070309020205020404" pitchFamily="49" charset="0"/>
+              </a:rPr>
+              <a:t>int</a:t>
+            </a:r>
+            <a:r>
+              <a:rPr lang="uk-UA" dirty="0">
+                <a:latin typeface="Courier New" panose="02070309020205020404" pitchFamily="49" charset="0"/>
+                <a:cs typeface="Courier New" panose="02070309020205020404" pitchFamily="49" charset="0"/>
+              </a:rPr>
+              <a:t> </a:t>
+            </a:r>
+            <a:r>
+              <a:rPr lang="uk-UA" dirty="0" err="1">
+                <a:latin typeface="Courier New" panose="02070309020205020404" pitchFamily="49" charset="0"/>
+                <a:cs typeface="Courier New" panose="02070309020205020404" pitchFamily="49" charset="0"/>
+              </a:rPr>
+              <a:t>більше_число</a:t>
+            </a:r>
+            <a:r>
+              <a:rPr lang="uk-UA" dirty="0">
+                <a:latin typeface="Courier New" panose="02070309020205020404" pitchFamily="49" charset="0"/>
+                <a:cs typeface="Courier New" panose="02070309020205020404" pitchFamily="49" charset="0"/>
+              </a:rPr>
+              <a:t> = (число1 &gt; число2) ? число1 : число2;</a:t>
+            </a:r>
+            <a:endParaRPr lang="en-US" dirty="0">
+              <a:latin typeface="Courier New" panose="02070309020205020404" pitchFamily="49" charset="0"/>
+              <a:cs typeface="Courier New" panose="02070309020205020404" pitchFamily="49" charset="0"/>
+            </a:endParaRPr>
+          </a:p>
+          <a:p>
+            <a:endParaRPr lang="en-US" dirty="0">
+              <a:latin typeface="Courier New" panose="02070309020205020404" pitchFamily="49" charset="0"/>
+              <a:cs typeface="Courier New" panose="02070309020205020404" pitchFamily="49" charset="0"/>
+            </a:endParaRPr>
+          </a:p>
+          <a:p>
+            <a:r>
+              <a:rPr lang="en-US" dirty="0">
+                <a:latin typeface="Courier New" panose="02070309020205020404" pitchFamily="49" charset="0"/>
+                <a:cs typeface="Courier New" panose="02070309020205020404" pitchFamily="49" charset="0"/>
+              </a:rPr>
+              <a:t>int result = true ? 1 : 0;</a:t>
+            </a:r>
+            <a:endParaRPr lang="uk-UA" dirty="0">
+              <a:latin typeface="Courier New" panose="02070309020205020404" pitchFamily="49" charset="0"/>
+              <a:cs typeface="Courier New" panose="02070309020205020404" pitchFamily="49" charset="0"/>
+            </a:endParaRPr>
+          </a:p>
+          <a:p>
+            <a:endParaRPr lang="uk-UA" dirty="0">
+              <a:latin typeface="Courier New" panose="02070309020205020404" pitchFamily="49" charset="0"/>
+              <a:cs typeface="Courier New" panose="02070309020205020404" pitchFamily="49" charset="0"/>
+            </a:endParaRPr>
+          </a:p>
+          <a:p>
+            <a:r>
+              <a:rPr lang="uk-UA" dirty="0" err="1">
+                <a:latin typeface="Courier New" panose="02070309020205020404" pitchFamily="49" charset="0"/>
+                <a:cs typeface="Courier New" panose="02070309020205020404" pitchFamily="49" charset="0"/>
+              </a:rPr>
+              <a:t>System.out.println</a:t>
+            </a:r>
+            <a:r>
+              <a:rPr lang="uk-UA" dirty="0">
+                <a:latin typeface="Courier New" panose="02070309020205020404" pitchFamily="49" charset="0"/>
+                <a:cs typeface="Courier New" panose="02070309020205020404" pitchFamily="49" charset="0"/>
+              </a:rPr>
+              <a:t>("Більше число: " + </a:t>
+            </a:r>
+            <a:r>
+              <a:rPr lang="uk-UA" dirty="0" err="1">
+                <a:latin typeface="Courier New" panose="02070309020205020404" pitchFamily="49" charset="0"/>
+                <a:cs typeface="Courier New" panose="02070309020205020404" pitchFamily="49" charset="0"/>
+              </a:rPr>
+              <a:t>більше_число</a:t>
+            </a:r>
+            <a:r>
+              <a:rPr lang="uk-UA" dirty="0">
+                <a:latin typeface="Courier New" panose="02070309020205020404" pitchFamily="49" charset="0"/>
+                <a:cs typeface="Courier New" panose="02070309020205020404" pitchFamily="49" charset="0"/>
+              </a:rPr>
+              <a:t>);</a:t>
+            </a:r>
+          </a:p>
+        </p:txBody>
+      </p:sp>
+      <p:sp>
+        <p:nvSpPr>
+          <p:cNvPr id="5" name="TextBox 4">
+            <a:extLst>
+              <a:ext uri="{FF2B5EF4-FFF2-40B4-BE49-F238E27FC236}">
+                <a16:creationId xmlns:a16="http://schemas.microsoft.com/office/drawing/2014/main" id="{0238E990-3399-43FE-86B5-CA39583DA34A}"/>
+              </a:ext>
+            </a:extLst>
+          </p:cNvPr>
+          <p:cNvSpPr txBox="1"/>
+          <p:nvPr/>
+        </p:nvSpPr>
+        <p:spPr>
+          <a:xfrm>
+            <a:off x="7553595" y="4487658"/>
+            <a:ext cx="4769963" cy="2585323"/>
+          </a:xfrm>
+          <a:prstGeom prst="rect">
+            <a:avLst/>
+          </a:prstGeom>
+          <a:noFill/>
+        </p:spPr>
+        <p:txBody>
+          <a:bodyPr wrap="square" rtlCol="0">
+            <a:spAutoFit/>
+          </a:bodyPr>
+          <a:lstStyle/>
+          <a:p>
+            <a:r>
+              <a:rPr lang="uk-UA" sz="2400" dirty="0">
+                <a:latin typeface="Times New Roman" panose="02020603050405020304" pitchFamily="18" charset="0"/>
+                <a:cs typeface="Times New Roman" panose="02020603050405020304" pitchFamily="18" charset="0"/>
+              </a:rPr>
+              <a:t>У цьому прикладі `</a:t>
+            </a:r>
+            <a:r>
+              <a:rPr lang="uk-UA" sz="2400" dirty="0" err="1">
+                <a:latin typeface="Times New Roman" panose="02020603050405020304" pitchFamily="18" charset="0"/>
+                <a:cs typeface="Times New Roman" panose="02020603050405020304" pitchFamily="18" charset="0"/>
+              </a:rPr>
+              <a:t>більше_число</a:t>
+            </a:r>
+            <a:r>
+              <a:rPr lang="uk-UA" sz="2400" dirty="0">
+                <a:latin typeface="Times New Roman" panose="02020603050405020304" pitchFamily="18" charset="0"/>
+                <a:cs typeface="Times New Roman" panose="02020603050405020304" pitchFamily="18" charset="0"/>
+              </a:rPr>
+              <a:t>` отримує значення `число1`, якщо `число1` більше `число2`, інакше воно отримує значення `число2`. Таким чином, відображається більше з двох чисел.</a:t>
+            </a:r>
+          </a:p>
+          <a:p>
+            <a:endParaRPr lang="uk-UA" dirty="0"/>
+          </a:p>
+        </p:txBody>
+      </p:sp>
+      <p:sp>
+        <p:nvSpPr>
+          <p:cNvPr id="6" name="Shape4326">
+            <a:extLst>
+              <a:ext uri="{FF2B5EF4-FFF2-40B4-BE49-F238E27FC236}">
+                <a16:creationId xmlns:a16="http://schemas.microsoft.com/office/drawing/2014/main" id="{5A92C31C-0A4F-4A69-A72F-6F279E3E06E2}"/>
+              </a:ext>
+            </a:extLst>
+          </p:cNvPr>
+          <p:cNvSpPr/>
+          <p:nvPr>
+            <p:custDataLst>
+              <p:tags r:id="rId1"/>
+            </p:custDataLst>
+          </p:nvPr>
+        </p:nvSpPr>
+        <p:spPr>
+          <a:xfrm flipH="1">
+            <a:off x="7507876" y="4490500"/>
+            <a:ext cx="45719" cy="2367500"/>
+          </a:xfrm>
+          <a:prstGeom prst="rect">
+            <a:avLst/>
+          </a:prstGeom>
+          <a:solidFill>
+            <a:srgbClr val="000000">
+              <a:alpha val="50196"/>
+            </a:srgbClr>
+          </a:solidFill>
+          <a:ln>
+            <a:noFill/>
+          </a:ln>
+        </p:spPr>
+        <p:style>
+          <a:lnRef idx="2">
+            <a:schemeClr val="accent1">
+              <a:shade val="15000"/>
+            </a:schemeClr>
+          </a:lnRef>
+          <a:fillRef idx="1">
+            <a:schemeClr val="accent1"/>
+          </a:fillRef>
+          <a:effectRef idx="0">
+            <a:schemeClr val="accent1"/>
+          </a:effectRef>
+          <a:fontRef idx="minor">
+            <a:schemeClr val="lt1"/>
+          </a:fontRef>
+        </p:style>
+        <p:txBody>
+          <a:bodyPr rtlCol="0" anchor="ctr">
+            <a:noAutofit/>
+          </a:bodyPr>
+          <a:lstStyle>
+            <a:defPPr>
+              <a:defRPr lang="en-US"/>
+            </a:defPPr>
+            <a:lvl1pPr marL="0" algn="l" defTabSz="914400" rtl="0" eaLnBrk="1" latinLnBrk="0" hangingPunct="1">
+              <a:defRPr sz="1800" kern="1200">
+                <a:solidFill>
+                  <a:srgbClr val="FFFFFF"/>
+                </a:solidFill>
+                <a:latin typeface="Comfortaa"/>
+                <a:ea typeface="+mn-ea"/>
+                <a:cs typeface="+mn-cs"/>
+              </a:defRPr>
+            </a:lvl1pPr>
+            <a:lvl2pPr marL="457200" algn="l" defTabSz="914400" rtl="0" eaLnBrk="1" latinLnBrk="0" hangingPunct="1">
+              <a:defRPr sz="1800" kern="1200">
+                <a:solidFill>
+                  <a:srgbClr val="FFFFFF"/>
+                </a:solidFill>
+                <a:latin typeface="Comfortaa"/>
+                <a:ea typeface="+mn-ea"/>
+                <a:cs typeface="+mn-cs"/>
+              </a:defRPr>
+            </a:lvl2pPr>
+            <a:lvl3pPr marL="914400" algn="l" defTabSz="914400" rtl="0" eaLnBrk="1" latinLnBrk="0" hangingPunct="1">
+              <a:defRPr sz="1800" kern="1200">
+                <a:solidFill>
+                  <a:srgbClr val="FFFFFF"/>
+                </a:solidFill>
+                <a:latin typeface="Comfortaa"/>
+                <a:ea typeface="+mn-ea"/>
+                <a:cs typeface="+mn-cs"/>
+              </a:defRPr>
+            </a:lvl3pPr>
+            <a:lvl4pPr marL="1371600" algn="l" defTabSz="914400" rtl="0" eaLnBrk="1" latinLnBrk="0" hangingPunct="1">
+              <a:defRPr sz="1800" kern="1200">
+                <a:solidFill>
+                  <a:srgbClr val="FFFFFF"/>
+                </a:solidFill>
+                <a:latin typeface="Comfortaa"/>
+                <a:ea typeface="+mn-ea"/>
+                <a:cs typeface="+mn-cs"/>
+              </a:defRPr>
+            </a:lvl4pPr>
+            <a:lvl5pPr marL="1828800" algn="l" defTabSz="914400" rtl="0" eaLnBrk="1" latinLnBrk="0" hangingPunct="1">
+              <a:defRPr sz="1800" kern="1200">
+                <a:solidFill>
+                  <a:srgbClr val="FFFFFF"/>
+                </a:solidFill>
+                <a:latin typeface="Comfortaa"/>
+                <a:ea typeface="+mn-ea"/>
+                <a:cs typeface="+mn-cs"/>
+              </a:defRPr>
+            </a:lvl5pPr>
+            <a:lvl6pPr marL="2286000" algn="l" defTabSz="914400" rtl="0" eaLnBrk="1" latinLnBrk="0" hangingPunct="1">
+              <a:defRPr sz="1800" kern="1200">
+                <a:solidFill>
+                  <a:srgbClr val="FFFFFF"/>
+                </a:solidFill>
+                <a:latin typeface="Comfortaa"/>
+                <a:ea typeface="+mn-ea"/>
+                <a:cs typeface="+mn-cs"/>
+              </a:defRPr>
+            </a:lvl6pPr>
+            <a:lvl7pPr marL="2743200" algn="l" defTabSz="914400" rtl="0" eaLnBrk="1" latinLnBrk="0" hangingPunct="1">
+              <a:defRPr sz="1800" kern="1200">
+                <a:solidFill>
+                  <a:srgbClr val="FFFFFF"/>
+                </a:solidFill>
+                <a:latin typeface="Comfortaa"/>
+                <a:ea typeface="+mn-ea"/>
+                <a:cs typeface="+mn-cs"/>
+              </a:defRPr>
+            </a:lvl7pPr>
+            <a:lvl8pPr marL="3200400" algn="l" defTabSz="914400" rtl="0" eaLnBrk="1" latinLnBrk="0" hangingPunct="1">
+              <a:defRPr sz="1800" kern="1200">
+                <a:solidFill>
+                  <a:srgbClr val="FFFFFF"/>
+                </a:solidFill>
+                <a:latin typeface="Comfortaa"/>
+                <a:ea typeface="+mn-ea"/>
+                <a:cs typeface="+mn-cs"/>
+              </a:defRPr>
+            </a:lvl8pPr>
+            <a:lvl9pPr marL="3657600" algn="l" defTabSz="914400" rtl="0" eaLnBrk="1" latinLnBrk="0" hangingPunct="1">
+              <a:defRPr sz="1800" kern="1200">
+                <a:solidFill>
+                  <a:srgbClr val="FFFFFF"/>
+                </a:solidFill>
+                <a:latin typeface="Comfortaa"/>
+                <a:ea typeface="+mn-ea"/>
+                <a:cs typeface="+mn-cs"/>
+              </a:defRPr>
+            </a:lvl9pPr>
+          </a:lstStyle>
+          <a:p>
+            <a:pPr algn="ctr"/>
+            <a:endParaRPr lang="ru-RU"/>
+          </a:p>
+        </p:txBody>
+      </p:sp>
+      <p:sp>
+        <p:nvSpPr>
+          <p:cNvPr id="8" name="Shape784">
+            <a:extLst>
+              <a:ext uri="{FF2B5EF4-FFF2-40B4-BE49-F238E27FC236}">
+                <a16:creationId xmlns:a16="http://schemas.microsoft.com/office/drawing/2014/main" id="{63E12B3C-F3CA-47FF-8C0F-5C7F5BAA4FFD}"/>
+              </a:ext>
+            </a:extLst>
+          </p:cNvPr>
+          <p:cNvSpPr/>
+          <p:nvPr>
+            <p:custDataLst>
+              <p:tags r:id="rId2"/>
+            </p:custDataLst>
+          </p:nvPr>
+        </p:nvSpPr>
+        <p:spPr>
+          <a:xfrm>
+            <a:off x="11494482" y="-498217"/>
+            <a:ext cx="1239945" cy="1239945"/>
+          </a:xfrm>
+          <a:prstGeom prst="ellipse">
+            <a:avLst/>
+          </a:prstGeom>
+          <a:solidFill>
+            <a:srgbClr val="E7E6E6">
+              <a:alpha val="50196"/>
+            </a:srgbClr>
+          </a:solidFill>
+          <a:ln>
+            <a:noFill/>
+          </a:ln>
+        </p:spPr>
+        <p:style>
+          <a:lnRef idx="2">
+            <a:schemeClr val="accent1">
+              <a:shade val="50000"/>
+            </a:schemeClr>
+          </a:lnRef>
+          <a:fillRef idx="1">
+            <a:schemeClr val="accent1"/>
+          </a:fillRef>
+          <a:effectRef idx="0">
+            <a:schemeClr val="accent1"/>
+          </a:effectRef>
+          <a:fontRef idx="minor">
+            <a:schemeClr val="lt1"/>
+          </a:fontRef>
+        </p:style>
+        <p:txBody>
+          <a:bodyPr lIns="91440" tIns="45720" rIns="91440" bIns="45720" rtlCol="0" anchor="ctr">
+            <a:noAutofit/>
+          </a:bodyPr>
+          <a:lstStyle>
+            <a:defPPr>
+              <a:defRPr lang="en-US"/>
+            </a:defPPr>
+            <a:lvl1pPr marL="0" algn="l" defTabSz="914400" rtl="0" eaLnBrk="1" latinLnBrk="0" hangingPunct="1">
+              <a:defRPr sz="1800" kern="1200">
+                <a:solidFill>
+                  <a:srgbClr val="FFFFFF"/>
+                </a:solidFill>
+                <a:latin typeface="Comfortaa"/>
+                <a:ea typeface="Arial"/>
+                <a:cs typeface="Arial"/>
+              </a:defRPr>
+            </a:lvl1pPr>
+            <a:lvl2pPr marL="457200" algn="l" defTabSz="914400" rtl="0" eaLnBrk="1" latinLnBrk="0" hangingPunct="1">
+              <a:defRPr sz="1800" kern="1200">
+                <a:solidFill>
+                  <a:srgbClr val="FFFFFF"/>
+                </a:solidFill>
+                <a:latin typeface="Comfortaa"/>
+                <a:ea typeface="Arial"/>
+                <a:cs typeface="Arial"/>
+              </a:defRPr>
+            </a:lvl2pPr>
+            <a:lvl3pPr marL="914400" algn="l" defTabSz="914400" rtl="0" eaLnBrk="1" latinLnBrk="0" hangingPunct="1">
+              <a:defRPr sz="1800" kern="1200">
+                <a:solidFill>
+                  <a:srgbClr val="FFFFFF"/>
+                </a:solidFill>
+                <a:latin typeface="Comfortaa"/>
+                <a:ea typeface="Arial"/>
+                <a:cs typeface="Arial"/>
+              </a:defRPr>
+            </a:lvl3pPr>
+            <a:lvl4pPr marL="1371600" algn="l" defTabSz="914400" rtl="0" eaLnBrk="1" latinLnBrk="0" hangingPunct="1">
+              <a:defRPr sz="1800" kern="1200">
+                <a:solidFill>
+                  <a:srgbClr val="FFFFFF"/>
+                </a:solidFill>
+                <a:latin typeface="Comfortaa"/>
+                <a:ea typeface="Arial"/>
+                <a:cs typeface="Arial"/>
+              </a:defRPr>
+            </a:lvl4pPr>
+            <a:lvl5pPr marL="1828800" algn="l" defTabSz="914400" rtl="0" eaLnBrk="1" latinLnBrk="0" hangingPunct="1">
+              <a:defRPr sz="1800" kern="1200">
+                <a:solidFill>
+                  <a:srgbClr val="FFFFFF"/>
+                </a:solidFill>
+                <a:latin typeface="Comfortaa"/>
+                <a:ea typeface="Arial"/>
+                <a:cs typeface="Arial"/>
+              </a:defRPr>
+            </a:lvl5pPr>
+            <a:lvl6pPr marL="2286000" algn="l" defTabSz="914400" rtl="0" eaLnBrk="1" latinLnBrk="0" hangingPunct="1">
+              <a:defRPr sz="1800" kern="1200">
+                <a:solidFill>
+                  <a:srgbClr val="FFFFFF"/>
+                </a:solidFill>
+                <a:latin typeface="Comfortaa"/>
+                <a:ea typeface="Arial"/>
+                <a:cs typeface="Arial"/>
+              </a:defRPr>
+            </a:lvl6pPr>
+            <a:lvl7pPr marL="2743200" algn="l" defTabSz="914400" rtl="0" eaLnBrk="1" latinLnBrk="0" hangingPunct="1">
+              <a:defRPr sz="1800" kern="1200">
+                <a:solidFill>
+                  <a:srgbClr val="FFFFFF"/>
+                </a:solidFill>
+                <a:latin typeface="Comfortaa"/>
+                <a:ea typeface="Arial"/>
+                <a:cs typeface="Arial"/>
+              </a:defRPr>
+            </a:lvl7pPr>
+            <a:lvl8pPr marL="3200400" algn="l" defTabSz="914400" rtl="0" eaLnBrk="1" latinLnBrk="0" hangingPunct="1">
+              <a:defRPr sz="1800" kern="1200">
+                <a:solidFill>
+                  <a:srgbClr val="FFFFFF"/>
+                </a:solidFill>
+                <a:latin typeface="Comfortaa"/>
+                <a:ea typeface="Arial"/>
+                <a:cs typeface="Arial"/>
+              </a:defRPr>
+            </a:lvl8pPr>
+            <a:lvl9pPr marL="3657600" algn="l" defTabSz="914400" rtl="0" eaLnBrk="1" latinLnBrk="0" hangingPunct="1">
+              <a:defRPr sz="1800" kern="1200">
+                <a:solidFill>
+                  <a:srgbClr val="FFFFFF"/>
+                </a:solidFill>
+                <a:latin typeface="Comfortaa"/>
+                <a:ea typeface="Arial"/>
+                <a:cs typeface="Arial"/>
+              </a:defRPr>
+            </a:lvl9pPr>
+          </a:lstStyle>
+          <a:p>
+            <a:pPr algn="ctr"/>
+            <a:endParaRPr lang="ru-RU" sz="1100">
+              <a:solidFill>
+                <a:srgbClr val="000000"/>
+              </a:solidFill>
+              <a:latin typeface="Comfortaa"/>
+            </a:endParaRPr>
+          </a:p>
+        </p:txBody>
+      </p:sp>
+      <p:sp>
+        <p:nvSpPr>
+          <p:cNvPr id="9" name="Shape784">
+            <a:extLst>
+              <a:ext uri="{FF2B5EF4-FFF2-40B4-BE49-F238E27FC236}">
+                <a16:creationId xmlns:a16="http://schemas.microsoft.com/office/drawing/2014/main" id="{8951E7CA-9D3C-4574-B18B-E82B642ADC8F}"/>
+              </a:ext>
+            </a:extLst>
+          </p:cNvPr>
+          <p:cNvSpPr/>
+          <p:nvPr>
+            <p:custDataLst>
+              <p:tags r:id="rId3"/>
+            </p:custDataLst>
+          </p:nvPr>
+        </p:nvSpPr>
+        <p:spPr>
+          <a:xfrm>
+            <a:off x="-454075" y="6120298"/>
+            <a:ext cx="1239945" cy="1239945"/>
+          </a:xfrm>
+          <a:prstGeom prst="ellipse">
+            <a:avLst/>
+          </a:prstGeom>
+          <a:solidFill>
+            <a:srgbClr val="E7E6E6">
+              <a:alpha val="50196"/>
+            </a:srgbClr>
+          </a:solidFill>
+          <a:ln>
+            <a:noFill/>
+          </a:ln>
+        </p:spPr>
+        <p:style>
+          <a:lnRef idx="2">
+            <a:schemeClr val="accent1">
+              <a:shade val="50000"/>
+            </a:schemeClr>
+          </a:lnRef>
+          <a:fillRef idx="1">
+            <a:schemeClr val="accent1"/>
+          </a:fillRef>
+          <a:effectRef idx="0">
+            <a:schemeClr val="accent1"/>
+          </a:effectRef>
+          <a:fontRef idx="minor">
+            <a:schemeClr val="lt1"/>
+          </a:fontRef>
+        </p:style>
+        <p:txBody>
+          <a:bodyPr lIns="91440" tIns="45720" rIns="91440" bIns="45720" rtlCol="0" anchor="ctr">
+            <a:noAutofit/>
+          </a:bodyPr>
+          <a:lstStyle>
+            <a:defPPr>
+              <a:defRPr lang="en-US"/>
+            </a:defPPr>
+            <a:lvl1pPr marL="0" algn="l" defTabSz="914400" rtl="0" eaLnBrk="1" latinLnBrk="0" hangingPunct="1">
+              <a:defRPr sz="1800" kern="1200">
+                <a:solidFill>
+                  <a:srgbClr val="FFFFFF"/>
+                </a:solidFill>
+                <a:latin typeface="Comfortaa"/>
+                <a:ea typeface="Arial"/>
+                <a:cs typeface="Arial"/>
+              </a:defRPr>
+            </a:lvl1pPr>
+            <a:lvl2pPr marL="457200" algn="l" defTabSz="914400" rtl="0" eaLnBrk="1" latinLnBrk="0" hangingPunct="1">
+              <a:defRPr sz="1800" kern="1200">
+                <a:solidFill>
+                  <a:srgbClr val="FFFFFF"/>
+                </a:solidFill>
+                <a:latin typeface="Comfortaa"/>
+                <a:ea typeface="Arial"/>
+                <a:cs typeface="Arial"/>
+              </a:defRPr>
+            </a:lvl2pPr>
+            <a:lvl3pPr marL="914400" algn="l" defTabSz="914400" rtl="0" eaLnBrk="1" latinLnBrk="0" hangingPunct="1">
+              <a:defRPr sz="1800" kern="1200">
+                <a:solidFill>
+                  <a:srgbClr val="FFFFFF"/>
+                </a:solidFill>
+                <a:latin typeface="Comfortaa"/>
+                <a:ea typeface="Arial"/>
+                <a:cs typeface="Arial"/>
+              </a:defRPr>
+            </a:lvl3pPr>
+            <a:lvl4pPr marL="1371600" algn="l" defTabSz="914400" rtl="0" eaLnBrk="1" latinLnBrk="0" hangingPunct="1">
+              <a:defRPr sz="1800" kern="1200">
+                <a:solidFill>
+                  <a:srgbClr val="FFFFFF"/>
+                </a:solidFill>
+                <a:latin typeface="Comfortaa"/>
+                <a:ea typeface="Arial"/>
+                <a:cs typeface="Arial"/>
+              </a:defRPr>
+            </a:lvl4pPr>
+            <a:lvl5pPr marL="1828800" algn="l" defTabSz="914400" rtl="0" eaLnBrk="1" latinLnBrk="0" hangingPunct="1">
+              <a:defRPr sz="1800" kern="1200">
+                <a:solidFill>
+                  <a:srgbClr val="FFFFFF"/>
+                </a:solidFill>
+                <a:latin typeface="Comfortaa"/>
+                <a:ea typeface="Arial"/>
+                <a:cs typeface="Arial"/>
+              </a:defRPr>
+            </a:lvl5pPr>
+            <a:lvl6pPr marL="2286000" algn="l" defTabSz="914400" rtl="0" eaLnBrk="1" latinLnBrk="0" hangingPunct="1">
+              <a:defRPr sz="1800" kern="1200">
+                <a:solidFill>
+                  <a:srgbClr val="FFFFFF"/>
+                </a:solidFill>
+                <a:latin typeface="Comfortaa"/>
+                <a:ea typeface="Arial"/>
+                <a:cs typeface="Arial"/>
+              </a:defRPr>
+            </a:lvl6pPr>
+            <a:lvl7pPr marL="2743200" algn="l" defTabSz="914400" rtl="0" eaLnBrk="1" latinLnBrk="0" hangingPunct="1">
+              <a:defRPr sz="1800" kern="1200">
+                <a:solidFill>
+                  <a:srgbClr val="FFFFFF"/>
+                </a:solidFill>
+                <a:latin typeface="Comfortaa"/>
+                <a:ea typeface="Arial"/>
+                <a:cs typeface="Arial"/>
+              </a:defRPr>
+            </a:lvl7pPr>
+            <a:lvl8pPr marL="3200400" algn="l" defTabSz="914400" rtl="0" eaLnBrk="1" latinLnBrk="0" hangingPunct="1">
+              <a:defRPr sz="1800" kern="1200">
+                <a:solidFill>
+                  <a:srgbClr val="FFFFFF"/>
+                </a:solidFill>
+                <a:latin typeface="Comfortaa"/>
+                <a:ea typeface="Arial"/>
+                <a:cs typeface="Arial"/>
+              </a:defRPr>
+            </a:lvl8pPr>
+            <a:lvl9pPr marL="3657600" algn="l" defTabSz="914400" rtl="0" eaLnBrk="1" latinLnBrk="0" hangingPunct="1">
+              <a:defRPr sz="1800" kern="1200">
+                <a:solidFill>
+                  <a:srgbClr val="FFFFFF"/>
+                </a:solidFill>
+                <a:latin typeface="Comfortaa"/>
+                <a:ea typeface="Arial"/>
+                <a:cs typeface="Arial"/>
+              </a:defRPr>
+            </a:lvl9pPr>
+          </a:lstStyle>
+          <a:p>
+            <a:pPr algn="ctr"/>
+            <a:endParaRPr lang="ru-RU" sz="1100">
+              <a:solidFill>
+                <a:srgbClr val="000000"/>
+              </a:solidFill>
+              <a:latin typeface="Comfortaa"/>
+            </a:endParaRPr>
+          </a:p>
+        </p:txBody>
+      </p:sp>
+      <p:grpSp>
+        <p:nvGrpSpPr>
+          <p:cNvPr id="16" name="Shape819">
+            <a:extLst>
+              <a:ext uri="{FF2B5EF4-FFF2-40B4-BE49-F238E27FC236}">
+                <a16:creationId xmlns:a16="http://schemas.microsoft.com/office/drawing/2014/main" id="{FAE2A225-67A7-44D8-AECA-74DD74F41D37}"/>
+              </a:ext>
+            </a:extLst>
+          </p:cNvPr>
+          <p:cNvGrpSpPr/>
+          <p:nvPr>
+            <p:custDataLst>
+              <p:tags r:id="rId4"/>
+            </p:custDataLst>
+          </p:nvPr>
+        </p:nvGrpSpPr>
+        <p:grpSpPr>
+          <a:xfrm>
+            <a:off x="7420483" y="3729079"/>
+            <a:ext cx="417198" cy="417276"/>
+            <a:chOff x="4207653" y="2394364"/>
+            <a:chExt cx="417198" cy="417276"/>
+          </a:xfrm>
+        </p:grpSpPr>
+        <p:sp>
+          <p:nvSpPr>
+            <p:cNvPr id="17" name="Shape789">
+              <a:extLst>
+                <a:ext uri="{FF2B5EF4-FFF2-40B4-BE49-F238E27FC236}">
+                  <a16:creationId xmlns:a16="http://schemas.microsoft.com/office/drawing/2014/main" id="{BFB2D1C6-D5EF-4B69-9444-A1D748ED49B1}"/>
+                </a:ext>
+              </a:extLst>
+            </p:cNvPr>
+            <p:cNvSpPr/>
+            <p:nvPr>
+              <p:custDataLst>
+                <p:tags r:id="rId5"/>
+              </p:custDataLst>
+            </p:nvPr>
+          </p:nvSpPr>
+          <p:spPr>
+            <a:xfrm>
+              <a:off x="4211962" y="2398594"/>
+              <a:ext cx="412889" cy="413046"/>
+            </a:xfrm>
+            <a:prstGeom prst="ellipse">
+              <a:avLst/>
+            </a:prstGeom>
+            <a:solidFill>
+              <a:srgbClr val="E7E6E6">
+                <a:alpha val="50196"/>
+              </a:srgbClr>
+            </a:solidFill>
+            <a:ln w="12700">
+              <a:noFill/>
+            </a:ln>
+          </p:spPr>
+          <p:style>
+            <a:lnRef idx="0">
+              <a:scrgbClr r="0" g="0" b="0"/>
+            </a:lnRef>
+            <a:fillRef idx="0">
+              <a:scrgbClr r="0" g="0" b="0"/>
+            </a:fillRef>
+            <a:effectRef idx="0">
+              <a:scrgbClr r="0" g="0" b="0"/>
+            </a:effectRef>
+            <a:fontRef idx="minor"/>
+          </p:style>
+          <p:txBody>
+            <a:bodyPr>
+              <a:noAutofit/>
+            </a:bodyPr>
+            <a:lstStyle>
+              <a:defPPr>
+                <a:defRPr lang="ru-RU"/>
+              </a:defPPr>
+              <a:lvl1pPr marL="0" algn="l" defTabSz="914400" rtl="0" eaLnBrk="1" latinLnBrk="0" hangingPunct="1">
+                <a:defRPr sz="1800" kern="1200">
+                  <a:solidFill>
+                    <a:schemeClr val="tx1"/>
+                  </a:solidFill>
+                  <a:latin typeface="+mn-lt"/>
+                  <a:ea typeface="+mn-ea"/>
+                  <a:cs typeface="+mn-cs"/>
+                </a:defRPr>
+              </a:lvl1pPr>
+              <a:lvl2pPr marL="457200" algn="l" defTabSz="914400" rtl="0" eaLnBrk="1" latinLnBrk="0" hangingPunct="1">
+                <a:defRPr sz="1800" kern="1200">
+                  <a:solidFill>
+                    <a:schemeClr val="tx1"/>
+                  </a:solidFill>
+                  <a:latin typeface="+mn-lt"/>
+                  <a:ea typeface="+mn-ea"/>
+                  <a:cs typeface="+mn-cs"/>
+                </a:defRPr>
+              </a:lvl2pPr>
+              <a:lvl3pPr marL="914400" algn="l" defTabSz="914400" rtl="0" eaLnBrk="1" latinLnBrk="0" hangingPunct="1">
+                <a:defRPr sz="1800" kern="1200">
+                  <a:solidFill>
+                    <a:schemeClr val="tx1"/>
+                  </a:solidFill>
+                  <a:latin typeface="+mn-lt"/>
+                  <a:ea typeface="+mn-ea"/>
+                  <a:cs typeface="+mn-cs"/>
+                </a:defRPr>
+              </a:lvl3pPr>
+              <a:lvl4pPr marL="1371600" algn="l" defTabSz="914400" rtl="0" eaLnBrk="1" latinLnBrk="0" hangingPunct="1">
+                <a:defRPr sz="1800" kern="1200">
+                  <a:solidFill>
+                    <a:schemeClr val="tx1"/>
+                  </a:solidFill>
+                  <a:latin typeface="+mn-lt"/>
+                  <a:ea typeface="+mn-ea"/>
+                  <a:cs typeface="+mn-cs"/>
+                </a:defRPr>
+              </a:lvl4pPr>
+              <a:lvl5pPr marL="1828800" algn="l" defTabSz="914400" rtl="0" eaLnBrk="1" latinLnBrk="0" hangingPunct="1">
+                <a:defRPr sz="1800" kern="1200">
+                  <a:solidFill>
+                    <a:schemeClr val="tx1"/>
+                  </a:solidFill>
+                  <a:latin typeface="+mn-lt"/>
+                  <a:ea typeface="+mn-ea"/>
+                  <a:cs typeface="+mn-cs"/>
+                </a:defRPr>
+              </a:lvl5pPr>
+              <a:lvl6pPr marL="2286000" algn="l" defTabSz="914400" rtl="0" eaLnBrk="1" latinLnBrk="0" hangingPunct="1">
+                <a:defRPr sz="1800" kern="1200">
+                  <a:solidFill>
+                    <a:schemeClr val="tx1"/>
+                  </a:solidFill>
+                  <a:latin typeface="+mn-lt"/>
+                  <a:ea typeface="+mn-ea"/>
+                  <a:cs typeface="+mn-cs"/>
+                </a:defRPr>
+              </a:lvl6pPr>
+              <a:lvl7pPr marL="2743200" algn="l" defTabSz="914400" rtl="0" eaLnBrk="1" latinLnBrk="0" hangingPunct="1">
+                <a:defRPr sz="1800" kern="1200">
+                  <a:solidFill>
+                    <a:schemeClr val="tx1"/>
+                  </a:solidFill>
+                  <a:latin typeface="+mn-lt"/>
+                  <a:ea typeface="+mn-ea"/>
+                  <a:cs typeface="+mn-cs"/>
+                </a:defRPr>
+              </a:lvl7pPr>
+              <a:lvl8pPr marL="3200400" algn="l" defTabSz="914400" rtl="0" eaLnBrk="1" latinLnBrk="0" hangingPunct="1">
+                <a:defRPr sz="1800" kern="1200">
+                  <a:solidFill>
+                    <a:schemeClr val="tx1"/>
+                  </a:solidFill>
+                  <a:latin typeface="+mn-lt"/>
+                  <a:ea typeface="+mn-ea"/>
+                  <a:cs typeface="+mn-cs"/>
+                </a:defRPr>
+              </a:lvl8pPr>
+              <a:lvl9pPr marL="3657600" algn="l" defTabSz="914400" rtl="0" eaLnBrk="1" latinLnBrk="0" hangingPunct="1">
+                <a:defRPr sz="1800" kern="1200">
+                  <a:solidFill>
+                    <a:schemeClr val="tx1"/>
+                  </a:solidFill>
+                  <a:latin typeface="+mn-lt"/>
+                  <a:ea typeface="+mn-ea"/>
+                  <a:cs typeface="+mn-cs"/>
+                </a:defRPr>
+              </a:lvl9pPr>
+            </a:lstStyle>
+            <a:p>
+              <a:endParaRPr/>
+            </a:p>
+          </p:txBody>
+        </p:sp>
+        <p:pic>
+          <p:nvPicPr>
+            <p:cNvPr id="18" name="Shape805">
+              <a:extLst>
+                <a:ext uri="{FF2B5EF4-FFF2-40B4-BE49-F238E27FC236}">
+                  <a16:creationId xmlns:a16="http://schemas.microsoft.com/office/drawing/2014/main" id="{6CE6956E-EEB4-4749-9D1B-8A05EFBF4E6A}"/>
+                </a:ext>
+              </a:extLst>
+            </p:cNvPr>
+            <p:cNvPicPr/>
+            <p:nvPr>
+              <p:custDataLst>
+                <p:tags r:id="rId6"/>
+              </p:custDataLst>
+            </p:nvPr>
+          </p:nvPicPr>
+          <p:blipFill>
+            <a:blip r:embed="rId8">
+              <a:extLst>
+                <a:ext uri="{96DAC541-7B7A-43D3-8B79-37D633B846F1}">
+                  <asvg:svgBlip xmlns:asvg="http://schemas.microsoft.com/office/drawing/2016/SVG/main" r:embed="rId9"/>
+                </a:ext>
+              </a:extLst>
+            </a:blip>
+            <a:stretch>
+              <a:fillRect/>
+            </a:stretch>
+          </p:blipFill>
+          <p:spPr>
+            <a:xfrm>
+              <a:off x="4207653" y="2394364"/>
+              <a:ext cx="316731" cy="316731"/>
+            </a:xfrm>
+            <a:prstGeom prst="rect">
+              <a:avLst/>
+            </a:prstGeom>
+          </p:spPr>
+        </p:pic>
+      </p:grpSp>
+    </p:spTree>
+    <p:extLst>
+      <p:ext uri="{BB962C8B-B14F-4D97-AF65-F5344CB8AC3E}">
+        <p14:creationId xmlns:p14="http://schemas.microsoft.com/office/powerpoint/2010/main" val="3129509225"/>
+      </p:ext>
+    </p:extLst>
+  </p:cSld>
+  <p:clrMapOvr>
+    <a:masterClrMapping/>
+  </p:clrMapOvr>
+</p:sld>
+</file>
+
+<file path=ppt/slides/slide23.xml><?xml version="1.0" encoding="utf-8"?>
+<p:sld xmlns:a="http://schemas.openxmlformats.org/drawingml/2006/main" xmlns:r="http://schemas.openxmlformats.org/officeDocument/2006/relationships" xmlns:p="http://schemas.openxmlformats.org/presentationml/2006/main">
+  <p:cSld>
+    <p:spTree>
+      <p:nvGrpSpPr>
+        <p:cNvPr id="1" name=""/>
+        <p:cNvGrpSpPr/>
+        <p:nvPr/>
+      </p:nvGrpSpPr>
+      <p:grpSpPr>
+        <a:xfrm>
+          <a:off x="0" y="0"/>
+          <a:ext cx="0" cy="0"/>
+          <a:chOff x="0" y="0"/>
+          <a:chExt cx="0" cy="0"/>
+        </a:xfrm>
+      </p:grpSpPr>
+      <p:sp>
+        <p:nvSpPr>
           <p:cNvPr id="13" name="Shape784">
             <a:extLst>
               <a:ext uri="{FF2B5EF4-FFF2-40B4-BE49-F238E27FC236}">
@@ -25463,7 +26651,7 @@
 </p:sld>
 </file>
 
-<file path=ppt/slides/slide23.xml><?xml version="1.0" encoding="utf-8"?>
+<file path=ppt/slides/slide24.xml><?xml version="1.0" encoding="utf-8"?>
 <p:sld xmlns:a="http://schemas.openxmlformats.org/drawingml/2006/main" xmlns:r="http://schemas.openxmlformats.org/officeDocument/2006/relationships" xmlns:p="http://schemas.openxmlformats.org/presentationml/2006/main">
   <p:cSld>
     <p:spTree>
@@ -29284,7 +30472,7 @@
 </p:sld>
 </file>
 
-<file path=ppt/slides/slide24.xml><?xml version="1.0" encoding="utf-8"?>
+<file path=ppt/slides/slide25.xml><?xml version="1.0" encoding="utf-8"?>
 <p:sld xmlns:a="http://schemas.openxmlformats.org/drawingml/2006/main" xmlns:r="http://schemas.openxmlformats.org/officeDocument/2006/relationships" xmlns:p="http://schemas.openxmlformats.org/presentationml/2006/main">
   <p:cSld>
     <p:spTree>
@@ -32707,7 +33895,7 @@
 </p:sld>
 </file>
 
-<file path=ppt/slides/slide25.xml><?xml version="1.0" encoding="utf-8"?>
+<file path=ppt/slides/slide26.xml><?xml version="1.0" encoding="utf-8"?>
 <p:sld xmlns:a="http://schemas.openxmlformats.org/drawingml/2006/main" xmlns:r="http://schemas.openxmlformats.org/officeDocument/2006/relationships" xmlns:p="http://schemas.openxmlformats.org/presentationml/2006/main">
   <p:cSld>
     <p:spTree>
@@ -36145,7 +37333,7 @@
 </p:sld>
 </file>
 
-<file path=ppt/slides/slide26.xml><?xml version="1.0" encoding="utf-8"?>
+<file path=ppt/slides/slide27.xml><?xml version="1.0" encoding="utf-8"?>
 <p:sld xmlns:a="http://schemas.openxmlformats.org/drawingml/2006/main" xmlns:r="http://schemas.openxmlformats.org/officeDocument/2006/relationships" xmlns:p="http://schemas.openxmlformats.org/presentationml/2006/main">
   <p:cSld>
     <p:spTree>
@@ -36533,7 +37721,7 @@
 </p:sld>
 </file>
 
-<file path=ppt/slides/slide27.xml><?xml version="1.0" encoding="utf-8"?>
+<file path=ppt/slides/slide28.xml><?xml version="1.0" encoding="utf-8"?>
 <p:sld xmlns:a="http://schemas.openxmlformats.org/drawingml/2006/main" xmlns:r="http://schemas.openxmlformats.org/officeDocument/2006/relationships" xmlns:p="http://schemas.openxmlformats.org/presentationml/2006/main">
   <p:cSld>
     <p:spTree>
@@ -47480,55 +48668,55 @@
 
 <file path=ppt/tags/tag11.xml><?xml version="1.0" encoding="utf-8"?>
 <p:tagLst xmlns:a="http://schemas.openxmlformats.org/drawingml/2006/main" xmlns:r="http://schemas.openxmlformats.org/officeDocument/2006/relationships" xmlns:p="http://schemas.openxmlformats.org/presentationml/2006/main">
-  <p:tag name="AS_UNIQUEID" val="784"/>
+  <p:tag name="AS_UNIQUEID" val="819"/>
 </p:tagLst>
 </file>
 
 <file path=ppt/tags/tag12.xml><?xml version="1.0" encoding="utf-8"?>
 <p:tagLst xmlns:a="http://schemas.openxmlformats.org/drawingml/2006/main" xmlns:r="http://schemas.openxmlformats.org/officeDocument/2006/relationships" xmlns:p="http://schemas.openxmlformats.org/presentationml/2006/main">
-  <p:tag name="AS_UNIQUEID" val="784"/>
+  <p:tag name="AS_UNIQUEID" val="789"/>
 </p:tagLst>
 </file>
 
 <file path=ppt/tags/tag13.xml><?xml version="1.0" encoding="utf-8"?>
 <p:tagLst xmlns:a="http://schemas.openxmlformats.org/drawingml/2006/main" xmlns:r="http://schemas.openxmlformats.org/officeDocument/2006/relationships" xmlns:p="http://schemas.openxmlformats.org/presentationml/2006/main">
-  <p:tag name="AS_UNIQUEID" val="798"/>
+  <p:tag name="AS_UNIQUEID" val="805"/>
 </p:tagLst>
 </file>
 
 <file path=ppt/tags/tag14.xml><?xml version="1.0" encoding="utf-8"?>
 <p:tagLst xmlns:a="http://schemas.openxmlformats.org/drawingml/2006/main" xmlns:r="http://schemas.openxmlformats.org/officeDocument/2006/relationships" xmlns:p="http://schemas.openxmlformats.org/presentationml/2006/main">
-  <p:tag name="AS_UNIQUEID" val="821"/>
+  <p:tag name="AS_UNIQUEID" val="784"/>
 </p:tagLst>
 </file>
 
 <file path=ppt/tags/tag15.xml><?xml version="1.0" encoding="utf-8"?>
 <p:tagLst xmlns:a="http://schemas.openxmlformats.org/drawingml/2006/main" xmlns:r="http://schemas.openxmlformats.org/officeDocument/2006/relationships" xmlns:p="http://schemas.openxmlformats.org/presentationml/2006/main">
-  <p:tag name="AS_UNIQUEID" val="825"/>
+  <p:tag name="AS_UNIQUEID" val="784"/>
 </p:tagLst>
 </file>
 
 <file path=ppt/tags/tag16.xml><?xml version="1.0" encoding="utf-8"?>
 <p:tagLst xmlns:a="http://schemas.openxmlformats.org/drawingml/2006/main" xmlns:r="http://schemas.openxmlformats.org/officeDocument/2006/relationships" xmlns:p="http://schemas.openxmlformats.org/presentationml/2006/main">
-  <p:tag name="AS_UNIQUEID" val="789"/>
+  <p:tag name="AS_UNIQUEID" val="784"/>
 </p:tagLst>
 </file>
 
 <file path=ppt/tags/tag17.xml><?xml version="1.0" encoding="utf-8"?>
 <p:tagLst xmlns:a="http://schemas.openxmlformats.org/drawingml/2006/main" xmlns:r="http://schemas.openxmlformats.org/officeDocument/2006/relationships" xmlns:p="http://schemas.openxmlformats.org/presentationml/2006/main">
-  <p:tag name="AS_UNIQUEID" val="813"/>
+  <p:tag name="AS_UNIQUEID" val="784"/>
 </p:tagLst>
 </file>
 
 <file path=ppt/tags/tag18.xml><?xml version="1.0" encoding="utf-8"?>
 <p:tagLst xmlns:a="http://schemas.openxmlformats.org/drawingml/2006/main" xmlns:r="http://schemas.openxmlformats.org/officeDocument/2006/relationships" xmlns:p="http://schemas.openxmlformats.org/presentationml/2006/main">
-  <p:tag name="AS_UNIQUEID" val="789"/>
+  <p:tag name="AS_UNIQUEID" val="784"/>
 </p:tagLst>
 </file>
 
 <file path=ppt/tags/tag19.xml><?xml version="1.0" encoding="utf-8"?>
 <p:tagLst xmlns:a="http://schemas.openxmlformats.org/drawingml/2006/main" xmlns:r="http://schemas.openxmlformats.org/officeDocument/2006/relationships" xmlns:p="http://schemas.openxmlformats.org/presentationml/2006/main">
-  <p:tag name="AS_UNIQUEID" val="809"/>
+  <p:tag name="AS_UNIQUEID" val="798"/>
 </p:tagLst>
 </file>
 
@@ -47540,61 +48728,61 @@
 
 <file path=ppt/tags/tag20.xml><?xml version="1.0" encoding="utf-8"?>
 <p:tagLst xmlns:a="http://schemas.openxmlformats.org/drawingml/2006/main" xmlns:r="http://schemas.openxmlformats.org/officeDocument/2006/relationships" xmlns:p="http://schemas.openxmlformats.org/presentationml/2006/main">
-  <p:tag name="AS_UNIQUEID" val="789"/>
+  <p:tag name="AS_UNIQUEID" val="821"/>
 </p:tagLst>
 </file>
 
 <file path=ppt/tags/tag21.xml><?xml version="1.0" encoding="utf-8"?>
 <p:tagLst xmlns:a="http://schemas.openxmlformats.org/drawingml/2006/main" xmlns:r="http://schemas.openxmlformats.org/officeDocument/2006/relationships" xmlns:p="http://schemas.openxmlformats.org/presentationml/2006/main">
-  <p:tag name="AS_UNIQUEID" val="794"/>
+  <p:tag name="AS_UNIQUEID" val="825"/>
 </p:tagLst>
 </file>
 
 <file path=ppt/tags/tag22.xml><?xml version="1.0" encoding="utf-8"?>
 <p:tagLst xmlns:a="http://schemas.openxmlformats.org/drawingml/2006/main" xmlns:r="http://schemas.openxmlformats.org/officeDocument/2006/relationships" xmlns:p="http://schemas.openxmlformats.org/presentationml/2006/main">
-  <p:tag name="AS_UNIQUEID" val="784"/>
+  <p:tag name="AS_UNIQUEID" val="789"/>
 </p:tagLst>
 </file>
 
 <file path=ppt/tags/tag23.xml><?xml version="1.0" encoding="utf-8"?>
 <p:tagLst xmlns:a="http://schemas.openxmlformats.org/drawingml/2006/main" xmlns:r="http://schemas.openxmlformats.org/officeDocument/2006/relationships" xmlns:p="http://schemas.openxmlformats.org/presentationml/2006/main">
-  <p:tag name="AS_UNIQUEID" val="821"/>
+  <p:tag name="AS_UNIQUEID" val="813"/>
 </p:tagLst>
 </file>
 
 <file path=ppt/tags/tag24.xml><?xml version="1.0" encoding="utf-8"?>
 <p:tagLst xmlns:a="http://schemas.openxmlformats.org/drawingml/2006/main" xmlns:r="http://schemas.openxmlformats.org/officeDocument/2006/relationships" xmlns:p="http://schemas.openxmlformats.org/presentationml/2006/main">
-  <p:tag name="AS_UNIQUEID" val="784"/>
+  <p:tag name="AS_UNIQUEID" val="789"/>
 </p:tagLst>
 </file>
 
 <file path=ppt/tags/tag25.xml><?xml version="1.0" encoding="utf-8"?>
 <p:tagLst xmlns:a="http://schemas.openxmlformats.org/drawingml/2006/main" xmlns:r="http://schemas.openxmlformats.org/officeDocument/2006/relationships" xmlns:p="http://schemas.openxmlformats.org/presentationml/2006/main">
-  <p:tag name="AS_UNIQUEID" val="784"/>
+  <p:tag name="AS_UNIQUEID" val="809"/>
 </p:tagLst>
 </file>
 
 <file path=ppt/tags/tag26.xml><?xml version="1.0" encoding="utf-8"?>
 <p:tagLst xmlns:a="http://schemas.openxmlformats.org/drawingml/2006/main" xmlns:r="http://schemas.openxmlformats.org/officeDocument/2006/relationships" xmlns:p="http://schemas.openxmlformats.org/presentationml/2006/main">
-  <p:tag name="AS_UNIQUEID" val="784"/>
+  <p:tag name="AS_UNIQUEID" val="789"/>
 </p:tagLst>
 </file>
 
 <file path=ppt/tags/tag27.xml><?xml version="1.0" encoding="utf-8"?>
 <p:tagLst xmlns:a="http://schemas.openxmlformats.org/drawingml/2006/main" xmlns:r="http://schemas.openxmlformats.org/officeDocument/2006/relationships" xmlns:p="http://schemas.openxmlformats.org/presentationml/2006/main">
-  <p:tag name="AS_UNIQUEID" val="784"/>
+  <p:tag name="AS_UNIQUEID" val="794"/>
 </p:tagLst>
 </file>
 
 <file path=ppt/tags/tag28.xml><?xml version="1.0" encoding="utf-8"?>
 <p:tagLst xmlns:a="http://schemas.openxmlformats.org/drawingml/2006/main" xmlns:r="http://schemas.openxmlformats.org/officeDocument/2006/relationships" xmlns:p="http://schemas.openxmlformats.org/presentationml/2006/main">
-  <p:tag name="AS_UNIQUEID" val="798"/>
+  <p:tag name="AS_UNIQUEID" val="784"/>
 </p:tagLst>
 </file>
 
 <file path=ppt/tags/tag29.xml><?xml version="1.0" encoding="utf-8"?>
 <p:tagLst xmlns:a="http://schemas.openxmlformats.org/drawingml/2006/main" xmlns:r="http://schemas.openxmlformats.org/officeDocument/2006/relationships" xmlns:p="http://schemas.openxmlformats.org/presentationml/2006/main">
-  <p:tag name="AS_UNIQUEID" val="825"/>
+  <p:tag name="AS_UNIQUEID" val="821"/>
 </p:tagLst>
 </file>
 
@@ -47606,49 +48794,49 @@
 
 <file path=ppt/tags/tag30.xml><?xml version="1.0" encoding="utf-8"?>
 <p:tagLst xmlns:a="http://schemas.openxmlformats.org/drawingml/2006/main" xmlns:r="http://schemas.openxmlformats.org/officeDocument/2006/relationships" xmlns:p="http://schemas.openxmlformats.org/presentationml/2006/main">
-  <p:tag name="AS_UNIQUEID" val="4326"/>
+  <p:tag name="AS_UNIQUEID" val="784"/>
 </p:tagLst>
 </file>
 
 <file path=ppt/tags/tag31.xml><?xml version="1.0" encoding="utf-8"?>
 <p:tagLst xmlns:a="http://schemas.openxmlformats.org/drawingml/2006/main" xmlns:r="http://schemas.openxmlformats.org/officeDocument/2006/relationships" xmlns:p="http://schemas.openxmlformats.org/presentationml/2006/main">
-  <p:tag name="AS_UNIQUEID" val="819"/>
+  <p:tag name="AS_UNIQUEID" val="784"/>
 </p:tagLst>
 </file>
 
 <file path=ppt/tags/tag32.xml><?xml version="1.0" encoding="utf-8"?>
 <p:tagLst xmlns:a="http://schemas.openxmlformats.org/drawingml/2006/main" xmlns:r="http://schemas.openxmlformats.org/officeDocument/2006/relationships" xmlns:p="http://schemas.openxmlformats.org/presentationml/2006/main">
-  <p:tag name="AS_UNIQUEID" val="789"/>
+  <p:tag name="AS_UNIQUEID" val="784"/>
 </p:tagLst>
 </file>
 
 <file path=ppt/tags/tag33.xml><?xml version="1.0" encoding="utf-8"?>
 <p:tagLst xmlns:a="http://schemas.openxmlformats.org/drawingml/2006/main" xmlns:r="http://schemas.openxmlformats.org/officeDocument/2006/relationships" xmlns:p="http://schemas.openxmlformats.org/presentationml/2006/main">
-  <p:tag name="AS_UNIQUEID" val="805"/>
+  <p:tag name="AS_UNIQUEID" val="784"/>
 </p:tagLst>
 </file>
 
 <file path=ppt/tags/tag34.xml><?xml version="1.0" encoding="utf-8"?>
 <p:tagLst xmlns:a="http://schemas.openxmlformats.org/drawingml/2006/main" xmlns:r="http://schemas.openxmlformats.org/officeDocument/2006/relationships" xmlns:p="http://schemas.openxmlformats.org/presentationml/2006/main">
-  <p:tag name="AS_UNIQUEID" val="789"/>
+  <p:tag name="AS_UNIQUEID" val="798"/>
 </p:tagLst>
 </file>
 
 <file path=ppt/tags/tag35.xml><?xml version="1.0" encoding="utf-8"?>
 <p:tagLst xmlns:a="http://schemas.openxmlformats.org/drawingml/2006/main" xmlns:r="http://schemas.openxmlformats.org/officeDocument/2006/relationships" xmlns:p="http://schemas.openxmlformats.org/presentationml/2006/main">
-  <p:tag name="AS_UNIQUEID" val="813"/>
+  <p:tag name="AS_UNIQUEID" val="825"/>
 </p:tagLst>
 </file>
 
 <file path=ppt/tags/tag36.xml><?xml version="1.0" encoding="utf-8"?>
 <p:tagLst xmlns:a="http://schemas.openxmlformats.org/drawingml/2006/main" xmlns:r="http://schemas.openxmlformats.org/officeDocument/2006/relationships" xmlns:p="http://schemas.openxmlformats.org/presentationml/2006/main">
-  <p:tag name="AS_UNIQUEID" val="789"/>
+  <p:tag name="AS_UNIQUEID" val="4326"/>
 </p:tagLst>
 </file>
 
 <file path=ppt/tags/tag37.xml><?xml version="1.0" encoding="utf-8"?>
 <p:tagLst xmlns:a="http://schemas.openxmlformats.org/drawingml/2006/main" xmlns:r="http://schemas.openxmlformats.org/officeDocument/2006/relationships" xmlns:p="http://schemas.openxmlformats.org/presentationml/2006/main">
-  <p:tag name="AS_UNIQUEID" val="794"/>
+  <p:tag name="AS_UNIQUEID" val="819"/>
 </p:tagLst>
 </file>
 
@@ -47660,7 +48848,7 @@
 
 <file path=ppt/tags/tag39.xml><?xml version="1.0" encoding="utf-8"?>
 <p:tagLst xmlns:a="http://schemas.openxmlformats.org/drawingml/2006/main" xmlns:r="http://schemas.openxmlformats.org/officeDocument/2006/relationships" xmlns:p="http://schemas.openxmlformats.org/presentationml/2006/main">
-  <p:tag name="AS_UNIQUEID" val="809"/>
+  <p:tag name="AS_UNIQUEID" val="805"/>
 </p:tagLst>
 </file>
 
@@ -47672,61 +48860,61 @@
 
 <file path=ppt/tags/tag40.xml><?xml version="1.0" encoding="utf-8"?>
 <p:tagLst xmlns:a="http://schemas.openxmlformats.org/drawingml/2006/main" xmlns:r="http://schemas.openxmlformats.org/officeDocument/2006/relationships" xmlns:p="http://schemas.openxmlformats.org/presentationml/2006/main">
-  <p:tag name="AS_UNIQUEID" val="784"/>
+  <p:tag name="AS_UNIQUEID" val="789"/>
 </p:tagLst>
 </file>
 
 <file path=ppt/tags/tag41.xml><?xml version="1.0" encoding="utf-8"?>
 <p:tagLst xmlns:a="http://schemas.openxmlformats.org/drawingml/2006/main" xmlns:r="http://schemas.openxmlformats.org/officeDocument/2006/relationships" xmlns:p="http://schemas.openxmlformats.org/presentationml/2006/main">
-  <p:tag name="AS_UNIQUEID" val="784"/>
+  <p:tag name="AS_UNIQUEID" val="813"/>
 </p:tagLst>
 </file>
 
 <file path=ppt/tags/tag42.xml><?xml version="1.0" encoding="utf-8"?>
 <p:tagLst xmlns:a="http://schemas.openxmlformats.org/drawingml/2006/main" xmlns:r="http://schemas.openxmlformats.org/officeDocument/2006/relationships" xmlns:p="http://schemas.openxmlformats.org/presentationml/2006/main">
-  <p:tag name="AS_UNIQUEID" val="784"/>
+  <p:tag name="AS_UNIQUEID" val="789"/>
 </p:tagLst>
 </file>
 
 <file path=ppt/tags/tag43.xml><?xml version="1.0" encoding="utf-8"?>
 <p:tagLst xmlns:a="http://schemas.openxmlformats.org/drawingml/2006/main" xmlns:r="http://schemas.openxmlformats.org/officeDocument/2006/relationships" xmlns:p="http://schemas.openxmlformats.org/presentationml/2006/main">
-  <p:tag name="AS_UNIQUEID" val="784"/>
+  <p:tag name="AS_UNIQUEID" val="794"/>
 </p:tagLst>
 </file>
 
 <file path=ppt/tags/tag44.xml><?xml version="1.0" encoding="utf-8"?>
 <p:tagLst xmlns:a="http://schemas.openxmlformats.org/drawingml/2006/main" xmlns:r="http://schemas.openxmlformats.org/officeDocument/2006/relationships" xmlns:p="http://schemas.openxmlformats.org/presentationml/2006/main">
-  <p:tag name="AS_UNIQUEID" val="784"/>
+  <p:tag name="AS_UNIQUEID" val="789"/>
 </p:tagLst>
 </file>
 
 <file path=ppt/tags/tag45.xml><?xml version="1.0" encoding="utf-8"?>
 <p:tagLst xmlns:a="http://schemas.openxmlformats.org/drawingml/2006/main" xmlns:r="http://schemas.openxmlformats.org/officeDocument/2006/relationships" xmlns:p="http://schemas.openxmlformats.org/presentationml/2006/main">
-  <p:tag name="AS_UNIQUEID" val="798"/>
+  <p:tag name="AS_UNIQUEID" val="809"/>
 </p:tagLst>
 </file>
 
 <file path=ppt/tags/tag46.xml><?xml version="1.0" encoding="utf-8"?>
 <p:tagLst xmlns:a="http://schemas.openxmlformats.org/drawingml/2006/main" xmlns:r="http://schemas.openxmlformats.org/officeDocument/2006/relationships" xmlns:p="http://schemas.openxmlformats.org/presentationml/2006/main">
-  <p:tag name="AS_UNIQUEID" val="825"/>
+  <p:tag name="AS_UNIQUEID" val="784"/>
 </p:tagLst>
 </file>
 
 <file path=ppt/tags/tag47.xml><?xml version="1.0" encoding="utf-8"?>
 <p:tagLst xmlns:a="http://schemas.openxmlformats.org/drawingml/2006/main" xmlns:r="http://schemas.openxmlformats.org/officeDocument/2006/relationships" xmlns:p="http://schemas.openxmlformats.org/presentationml/2006/main">
-  <p:tag name="AS_UNIQUEID" val="4326"/>
+  <p:tag name="AS_UNIQUEID" val="784"/>
 </p:tagLst>
 </file>
 
 <file path=ppt/tags/tag48.xml><?xml version="1.0" encoding="utf-8"?>
 <p:tagLst xmlns:a="http://schemas.openxmlformats.org/drawingml/2006/main" xmlns:r="http://schemas.openxmlformats.org/officeDocument/2006/relationships" xmlns:p="http://schemas.openxmlformats.org/presentationml/2006/main">
-  <p:tag name="AS_UNIQUEID" val="819"/>
+  <p:tag name="AS_UNIQUEID" val="784"/>
 </p:tagLst>
 </file>
 
 <file path=ppt/tags/tag49.xml><?xml version="1.0" encoding="utf-8"?>
 <p:tagLst xmlns:a="http://schemas.openxmlformats.org/drawingml/2006/main" xmlns:r="http://schemas.openxmlformats.org/officeDocument/2006/relationships" xmlns:p="http://schemas.openxmlformats.org/presentationml/2006/main">
-  <p:tag name="AS_UNIQUEID" val="789"/>
+  <p:tag name="AS_UNIQUEID" val="784"/>
 </p:tagLst>
 </file>
 
@@ -47738,61 +48926,61 @@
 
 <file path=ppt/tags/tag50.xml><?xml version="1.0" encoding="utf-8"?>
 <p:tagLst xmlns:a="http://schemas.openxmlformats.org/drawingml/2006/main" xmlns:r="http://schemas.openxmlformats.org/officeDocument/2006/relationships" xmlns:p="http://schemas.openxmlformats.org/presentationml/2006/main">
-  <p:tag name="AS_UNIQUEID" val="805"/>
+  <p:tag name="AS_UNIQUEID" val="784"/>
 </p:tagLst>
 </file>
 
 <file path=ppt/tags/tag51.xml><?xml version="1.0" encoding="utf-8"?>
 <p:tagLst xmlns:a="http://schemas.openxmlformats.org/drawingml/2006/main" xmlns:r="http://schemas.openxmlformats.org/officeDocument/2006/relationships" xmlns:p="http://schemas.openxmlformats.org/presentationml/2006/main">
-  <p:tag name="AS_UNIQUEID" val="789"/>
+  <p:tag name="AS_UNIQUEID" val="798"/>
 </p:tagLst>
 </file>
 
 <file path=ppt/tags/tag52.xml><?xml version="1.0" encoding="utf-8"?>
 <p:tagLst xmlns:a="http://schemas.openxmlformats.org/drawingml/2006/main" xmlns:r="http://schemas.openxmlformats.org/officeDocument/2006/relationships" xmlns:p="http://schemas.openxmlformats.org/presentationml/2006/main">
-  <p:tag name="AS_UNIQUEID" val="813"/>
+  <p:tag name="AS_UNIQUEID" val="825"/>
 </p:tagLst>
 </file>
 
 <file path=ppt/tags/tag53.xml><?xml version="1.0" encoding="utf-8"?>
 <p:tagLst xmlns:a="http://schemas.openxmlformats.org/drawingml/2006/main" xmlns:r="http://schemas.openxmlformats.org/officeDocument/2006/relationships" xmlns:p="http://schemas.openxmlformats.org/presentationml/2006/main">
-  <p:tag name="AS_UNIQUEID" val="789"/>
+  <p:tag name="AS_UNIQUEID" val="4326"/>
 </p:tagLst>
 </file>
 
 <file path=ppt/tags/tag54.xml><?xml version="1.0" encoding="utf-8"?>
 <p:tagLst xmlns:a="http://schemas.openxmlformats.org/drawingml/2006/main" xmlns:r="http://schemas.openxmlformats.org/officeDocument/2006/relationships" xmlns:p="http://schemas.openxmlformats.org/presentationml/2006/main">
-  <p:tag name="AS_UNIQUEID" val="794"/>
+  <p:tag name="AS_UNIQUEID" val="819"/>
 </p:tagLst>
 </file>
 
 <file path=ppt/tags/tag55.xml><?xml version="1.0" encoding="utf-8"?>
 <p:tagLst xmlns:a="http://schemas.openxmlformats.org/drawingml/2006/main" xmlns:r="http://schemas.openxmlformats.org/officeDocument/2006/relationships" xmlns:p="http://schemas.openxmlformats.org/presentationml/2006/main">
-  <p:tag name="AS_UNIQUEID" val="784"/>
+  <p:tag name="AS_UNIQUEID" val="789"/>
 </p:tagLst>
 </file>
 
 <file path=ppt/tags/tag56.xml><?xml version="1.0" encoding="utf-8"?>
 <p:tagLst xmlns:a="http://schemas.openxmlformats.org/drawingml/2006/main" xmlns:r="http://schemas.openxmlformats.org/officeDocument/2006/relationships" xmlns:p="http://schemas.openxmlformats.org/presentationml/2006/main">
-  <p:tag name="AS_UNIQUEID" val="784"/>
+  <p:tag name="AS_UNIQUEID" val="805"/>
 </p:tagLst>
 </file>
 
 <file path=ppt/tags/tag57.xml><?xml version="1.0" encoding="utf-8"?>
 <p:tagLst xmlns:a="http://schemas.openxmlformats.org/drawingml/2006/main" xmlns:r="http://schemas.openxmlformats.org/officeDocument/2006/relationships" xmlns:p="http://schemas.openxmlformats.org/presentationml/2006/main">
-  <p:tag name="AS_UNIQUEID" val="784"/>
+  <p:tag name="AS_UNIQUEID" val="789"/>
 </p:tagLst>
 </file>
 
 <file path=ppt/tags/tag58.xml><?xml version="1.0" encoding="utf-8"?>
 <p:tagLst xmlns:a="http://schemas.openxmlformats.org/drawingml/2006/main" xmlns:r="http://schemas.openxmlformats.org/officeDocument/2006/relationships" xmlns:p="http://schemas.openxmlformats.org/presentationml/2006/main">
-  <p:tag name="AS_UNIQUEID" val="784"/>
+  <p:tag name="AS_UNIQUEID" val="813"/>
 </p:tagLst>
 </file>
 
 <file path=ppt/tags/tag59.xml><?xml version="1.0" encoding="utf-8"?>
 <p:tagLst xmlns:a="http://schemas.openxmlformats.org/drawingml/2006/main" xmlns:r="http://schemas.openxmlformats.org/officeDocument/2006/relationships" xmlns:p="http://schemas.openxmlformats.org/presentationml/2006/main">
-  <p:tag name="AS_UNIQUEID" val="784"/>
+  <p:tag name="AS_UNIQUEID" val="789"/>
 </p:tagLst>
 </file>
 
@@ -47804,61 +48992,61 @@
 
 <file path=ppt/tags/tag60.xml><?xml version="1.0" encoding="utf-8"?>
 <p:tagLst xmlns:a="http://schemas.openxmlformats.org/drawingml/2006/main" xmlns:r="http://schemas.openxmlformats.org/officeDocument/2006/relationships" xmlns:p="http://schemas.openxmlformats.org/presentationml/2006/main">
-  <p:tag name="AS_UNIQUEID" val="798"/>
+  <p:tag name="AS_UNIQUEID" val="794"/>
 </p:tagLst>
 </file>
 
 <file path=ppt/tags/tag61.xml><?xml version="1.0" encoding="utf-8"?>
 <p:tagLst xmlns:a="http://schemas.openxmlformats.org/drawingml/2006/main" xmlns:r="http://schemas.openxmlformats.org/officeDocument/2006/relationships" xmlns:p="http://schemas.openxmlformats.org/presentationml/2006/main">
-  <p:tag name="AS_UNIQUEID" val="825"/>
+  <p:tag name="AS_UNIQUEID" val="784"/>
 </p:tagLst>
 </file>
 
 <file path=ppt/tags/tag62.xml><?xml version="1.0" encoding="utf-8"?>
 <p:tagLst xmlns:a="http://schemas.openxmlformats.org/drawingml/2006/main" xmlns:r="http://schemas.openxmlformats.org/officeDocument/2006/relationships" xmlns:p="http://schemas.openxmlformats.org/presentationml/2006/main">
-  <p:tag name="AS_UNIQUEID" val="819"/>
+  <p:tag name="AS_UNIQUEID" val="784"/>
 </p:tagLst>
 </file>
 
 <file path=ppt/tags/tag63.xml><?xml version="1.0" encoding="utf-8"?>
 <p:tagLst xmlns:a="http://schemas.openxmlformats.org/drawingml/2006/main" xmlns:r="http://schemas.openxmlformats.org/officeDocument/2006/relationships" xmlns:p="http://schemas.openxmlformats.org/presentationml/2006/main">
-  <p:tag name="AS_UNIQUEID" val="4326"/>
+  <p:tag name="AS_UNIQUEID" val="784"/>
 </p:tagLst>
 </file>
 
 <file path=ppt/tags/tag64.xml><?xml version="1.0" encoding="utf-8"?>
 <p:tagLst xmlns:a="http://schemas.openxmlformats.org/drawingml/2006/main" xmlns:r="http://schemas.openxmlformats.org/officeDocument/2006/relationships" xmlns:p="http://schemas.openxmlformats.org/presentationml/2006/main">
-  <p:tag name="AS_UNIQUEID" val="789"/>
+  <p:tag name="AS_UNIQUEID" val="784"/>
 </p:tagLst>
 </file>
 
 <file path=ppt/tags/tag65.xml><?xml version="1.0" encoding="utf-8"?>
 <p:tagLst xmlns:a="http://schemas.openxmlformats.org/drawingml/2006/main" xmlns:r="http://schemas.openxmlformats.org/officeDocument/2006/relationships" xmlns:p="http://schemas.openxmlformats.org/presentationml/2006/main">
-  <p:tag name="AS_UNIQUEID" val="805"/>
+  <p:tag name="AS_UNIQUEID" val="784"/>
 </p:tagLst>
 </file>
 
 <file path=ppt/tags/tag66.xml><?xml version="1.0" encoding="utf-8"?>
 <p:tagLst xmlns:a="http://schemas.openxmlformats.org/drawingml/2006/main" xmlns:r="http://schemas.openxmlformats.org/officeDocument/2006/relationships" xmlns:p="http://schemas.openxmlformats.org/presentationml/2006/main">
-  <p:tag name="AS_UNIQUEID" val="789"/>
+  <p:tag name="AS_UNIQUEID" val="798"/>
 </p:tagLst>
 </file>
 
 <file path=ppt/tags/tag67.xml><?xml version="1.0" encoding="utf-8"?>
 <p:tagLst xmlns:a="http://schemas.openxmlformats.org/drawingml/2006/main" xmlns:r="http://schemas.openxmlformats.org/officeDocument/2006/relationships" xmlns:p="http://schemas.openxmlformats.org/presentationml/2006/main">
-  <p:tag name="AS_UNIQUEID" val="813"/>
+  <p:tag name="AS_UNIQUEID" val="825"/>
 </p:tagLst>
 </file>
 
 <file path=ppt/tags/tag68.xml><?xml version="1.0" encoding="utf-8"?>
 <p:tagLst xmlns:a="http://schemas.openxmlformats.org/drawingml/2006/main" xmlns:r="http://schemas.openxmlformats.org/officeDocument/2006/relationships" xmlns:p="http://schemas.openxmlformats.org/presentationml/2006/main">
-  <p:tag name="AS_UNIQUEID" val="789"/>
+  <p:tag name="AS_UNIQUEID" val="819"/>
 </p:tagLst>
 </file>
 
 <file path=ppt/tags/tag69.xml><?xml version="1.0" encoding="utf-8"?>
 <p:tagLst xmlns:a="http://schemas.openxmlformats.org/drawingml/2006/main" xmlns:r="http://schemas.openxmlformats.org/officeDocument/2006/relationships" xmlns:p="http://schemas.openxmlformats.org/presentationml/2006/main">
-  <p:tag name="AS_UNIQUEID" val="794"/>
+  <p:tag name="AS_UNIQUEID" val="4326"/>
 </p:tagLst>
 </file>
 
@@ -47868,9 +49056,45 @@
 </p:tagLst>
 </file>
 
+<file path=ppt/tags/tag70.xml><?xml version="1.0" encoding="utf-8"?>
+<p:tagLst xmlns:a="http://schemas.openxmlformats.org/drawingml/2006/main" xmlns:r="http://schemas.openxmlformats.org/officeDocument/2006/relationships" xmlns:p="http://schemas.openxmlformats.org/presentationml/2006/main">
+  <p:tag name="AS_UNIQUEID" val="789"/>
+</p:tagLst>
+</file>
+
+<file path=ppt/tags/tag71.xml><?xml version="1.0" encoding="utf-8"?>
+<p:tagLst xmlns:a="http://schemas.openxmlformats.org/drawingml/2006/main" xmlns:r="http://schemas.openxmlformats.org/officeDocument/2006/relationships" xmlns:p="http://schemas.openxmlformats.org/presentationml/2006/main">
+  <p:tag name="AS_UNIQUEID" val="805"/>
+</p:tagLst>
+</file>
+
+<file path=ppt/tags/tag72.xml><?xml version="1.0" encoding="utf-8"?>
+<p:tagLst xmlns:a="http://schemas.openxmlformats.org/drawingml/2006/main" xmlns:r="http://schemas.openxmlformats.org/officeDocument/2006/relationships" xmlns:p="http://schemas.openxmlformats.org/presentationml/2006/main">
+  <p:tag name="AS_UNIQUEID" val="789"/>
+</p:tagLst>
+</file>
+
+<file path=ppt/tags/tag73.xml><?xml version="1.0" encoding="utf-8"?>
+<p:tagLst xmlns:a="http://schemas.openxmlformats.org/drawingml/2006/main" xmlns:r="http://schemas.openxmlformats.org/officeDocument/2006/relationships" xmlns:p="http://schemas.openxmlformats.org/presentationml/2006/main">
+  <p:tag name="AS_UNIQUEID" val="813"/>
+</p:tagLst>
+</file>
+
+<file path=ppt/tags/tag74.xml><?xml version="1.0" encoding="utf-8"?>
+<p:tagLst xmlns:a="http://schemas.openxmlformats.org/drawingml/2006/main" xmlns:r="http://schemas.openxmlformats.org/officeDocument/2006/relationships" xmlns:p="http://schemas.openxmlformats.org/presentationml/2006/main">
+  <p:tag name="AS_UNIQUEID" val="789"/>
+</p:tagLst>
+</file>
+
+<file path=ppt/tags/tag75.xml><?xml version="1.0" encoding="utf-8"?>
+<p:tagLst xmlns:a="http://schemas.openxmlformats.org/drawingml/2006/main" xmlns:r="http://schemas.openxmlformats.org/officeDocument/2006/relationships" xmlns:p="http://schemas.openxmlformats.org/presentationml/2006/main">
+  <p:tag name="AS_UNIQUEID" val="794"/>
+</p:tagLst>
+</file>
+
 <file path=ppt/tags/tag8.xml><?xml version="1.0" encoding="utf-8"?>
 <p:tagLst xmlns:a="http://schemas.openxmlformats.org/drawingml/2006/main" xmlns:r="http://schemas.openxmlformats.org/officeDocument/2006/relationships" xmlns:p="http://schemas.openxmlformats.org/presentationml/2006/main">
-  <p:tag name="AS_UNIQUEID" val="784"/>
+  <p:tag name="AS_UNIQUEID" val="4326"/>
 </p:tagLst>
 </file>
 
